--- a/strapi-architecture-cep-cms.pptx
+++ b/strapi-architecture-cep-cms.pptx
@@ -19,9 +19,10 @@
     <p:sldId id="267" r:id="rId13"/>
     <p:sldId id="268" r:id="rId14"/>
     <p:sldId id="269" r:id="rId15"/>
+    <p:sldId id="270" r:id="rId16"/>
   </p:sldIdLst>
   <p:notesMasterIdLst>
-    <p:notesMasterId r:id="rId16"/>
+    <p:notesMasterId r:id="rId17"/>
   </p:notesMasterIdLst>
   <p:sldSz cx="12192000" cy="6858000"/>
   <p:notesSz cx="6858000" cy="12192000"/>
@@ -518,9 +519,9 @@
               <a:t>Cover:
 • Session focus: navigator and template-screen only
 • Direct integration — no proxy in between
-• The defaultValue field ties CMS content to session state
+• How prefill/submit and live dropdowns tie CMS content to session state
 • Open forum — invite questions throughout
-This walkthrough is focused specifically on the two APIs you'll be integrating against: navigator and template-screen. I'll show how the app talks to our CMS directly — no proxy in between — walk through both endpoints in detail, and cover the one field, defaultValue, that ties CMS content back to your session state. Stop me anytime with questions, since this is meant to be a working session as much as a presentation.</a:t>
+This walkthrough is focused specifically on the two APIs you'll be integrating against: navigator and template-screen. I'll show how the app talks to our CMS directly — no proxy in between — walk through both endpoints in detail, and cover how prefill, submit, and live dropdowns tie CMS content back to your session state. Stop me anytime with questions, since this is meant to be a working session as much as a presentation.</a:t>
             </a:r>
             <a:endParaRPr lang="en-US" dirty="0"/>
           </a:p>
@@ -609,10 +610,11 @@
             <a:r>
               <a:rPr lang="en-US" dirty="0"/>
               <a:t>Cover:
-• defaultValue = static string OR a binding to an orchestrator variable
-• Used to prefill fields when the screen loads
-• Same binding used to remap form fields on submit
-This is the field that matters most for your integration: defaultValue. On some components, it's just a static string. But on form fields, it's typically a binding — a key that matches a variable name coming back from the orchestrator's session state. That's the mechanism that lets you prefill a field with data the user already entered on a previous step, and it's also what you use in reverse when submitting, to map your form's local field names back to the canonical variable names the orchestrator expects.</a:t>
+• Orchestrator variables are keyed by canonical UPPER_SNAKE_CASE names matching form fields
+• Prefill is a direct spread — useForm({ defaultValues: { ...variables } }) — no CMS binding lookup
+• buildSubmitPayload still remaps on submit, but it's typically a passthrough now
+• The CMS-authored defaultValue field has been removed — this naming convention replaces it
+This used to be the field that mattered most for integration — defaultValue, a CMS-authored binding. That field has been removed. The replacement is simpler: the orchestrator's variables bag is keyed by canonical UPPER_SNAKE_CASE names that already match your form's field names, so prefill is a direct spread, no lookup required. On submit, buildSubmitPayload still remaps keys to those canonical names before POSTing, but since the keys are usually already canonical, that step is typically just a passthrough now — it's a safety net, not the primary mechanism to design around.</a:t>
             </a:r>
             <a:endParaRPr lang="en-US" dirty="0"/>
           </a:p>
@@ -701,10 +703,11 @@
             <a:r>
               <a:rPr lang="en-US" dirty="0"/>
               <a:t>Cover:
-• Dropdown values are resolved server-side — ready-to-render list
-• hide flag defaults to true — unfinished components are never sent
-• Both are automatic; no extra logic required on your end
-Two more details worth knowing. When a screen has a dropdown, we don't just give you a relation ID — we resolve it server-side and hand you a ready-to-render list of options. And every component has a hidden flag that defaults to true, meaning our content team can build and stage a new screen in the CMS without it ever appearing in your app — you'll only ever receive components that are explicitly meant to be visible.</a:t>
+• Some dropdowns are live, not resolved ahead of time by the CMS
+• Detected via isDropdownComponent (templateScreenApi.ts)
+• Fetched via a separate call: useDropdownResponse(dataSource.url, template_id)
+• Independent of, and in addition to, the main template-screen fetch
+There are actually two dropdown mechanisms, and this is the one that's easy to miss. Static dropdowns — like address type — get their options resolved by the CMS and included directly in the template-screen response, which we'll cover next. But relationship or payment-option pickers are live: their options aren't in that response at all. You detect them with the isDropdownComponent type guard, and when a field has a dataSource, you fire a second, independent request — useDropdownResponse — to get its live option list. Miss this and those dropdowns will render empty.</a:t>
             </a:r>
             <a:endParaRPr lang="en-US" dirty="0"/>
           </a:p>
@@ -793,10 +796,10 @@
             <a:r>
               <a:rPr lang="en-US" dirty="0"/>
               <a:t>Cover:
-• Walk the table — both endpoints, methods, response shapes
-• Highlight the four rules of thumb
-• This slide doubles as their reference card after the meeting
-Here's the whole contract on one slide — the two endpoints, what you pass in, and what shape comes back. Keep this as your reference card during integration, especially the rules of thumb at the bottom — those are the four things most likely to trip up a first integration pass.</a:t>
+• Static dropdowns (options-group-backed) are resolved server-side — ready-to-render list, in the same response
+• hide flag defaults to true — unfinished components are never sent
+• Both are automatic; no extra logic required on your end
+To contrast with the live dropdowns we just covered: static dropdowns — like address type — don't need a second request. When a screen has one of these, we resolve its linked options group server-side and hand you a ready-to-render list of options right in the template-screen response. And every component has a hidden flag that defaults to true, meaning our content team can build and stage a new screen in the CMS without it ever appearing in your app — you'll only ever receive components that are explicitly meant to be visible.</a:t>
             </a:r>
             <a:endParaRPr lang="en-US" dirty="0"/>
           </a:p>
@@ -885,10 +888,10 @@
             <a:r>
               <a:rPr lang="en-US" dirty="0"/>
               <a:t>Cover:
-• Three triggers: new component type, new relation, a bug fix
-• We will always flag a contract change proactively
-• Otherwise, today's shape is stable
-A few things can cause the response shape to change on our end: a new type of component gets added to a screen, a field needs to expose a new relationship, or we find and fix a bug in how a relationship is resolved. When any of these happen, we'll flag it — but structurally, the shape you're integrating against today, the componentId-keyed map and the defaultValue bindings, is stable and won't change without notice.</a:t>
+• Walk the table — three endpoints, methods, response shapes
+• Highlight the five rules of thumb
+• This slide doubles as their reference card after the meeting
+Here's the whole contract on one slide — the endpoints, what you pass in, and what shape comes back, including the live-dropdown data-source call. Keep this as your reference card during integration, especially the rules of thumb at the bottom — those are the things most likely to trip up a first integration pass.</a:t>
             </a:r>
             <a:endParaRPr lang="en-US" dirty="0"/>
           </a:p>
@@ -977,9 +980,10 @@
             <a:r>
               <a:rPr lang="en-US" dirty="0"/>
               <a:t>Cover:
-• Recap: navigator + template-screen + the defaultValue contract
-• Open the floor for questions
-That's the full picture of how your app will talk to navigator and template-screen. Let's open it up — happy to go deeper into any endpoint, the sequence diagram, or the defaultValue binding contract specifically, since that's usually where integration questions come up.</a:t>
+• Three triggers: new component type, new relation, a bug fix
+• We will always flag a contract change proactively
+• Otherwise, today's shape is stable
+A few things can cause the response shape to change on our end: a new type of component gets added to a screen, a field needs to expose a new relationship, or we find and fix a bug in how a relationship is resolved. When any of these happen, we'll flag it — but structurally, the shape you're integrating against today, the componentId-keyed map and the canonical-naming prefill convention, is stable and won't change without notice.</a:t>
             </a:r>
             <a:endParaRPr lang="en-US" dirty="0"/>
           </a:p>
@@ -1003,6 +1007,97 @@
             <a:fld id="{F7021451-1387-4CA6-816F-3879F97B5CBC}" type="slidenum">
               <a:rPr lang="en-US"/>
               <a:t>14</a:t>
+            </a:fld>
+            <a:endParaRPr lang="en-US"/>
+          </a:p>
+        </p:txBody>
+      </p:sp>
+    </p:spTree>
+    <p:extLst>
+      <p:ext uri="{BB962C8B-B14F-4D97-AF65-F5344CB8AC3E}">
+        <p14:creationId xmlns:p14="http://schemas.microsoft.com/office/powerpoint/2010/main" val="1024086991"/>
+      </p:ext>
+    </p:extLst>
+  </p:cSld>
+  <p:clrMapOvr>
+    <a:masterClrMapping/>
+  </p:clrMapOvr>
+</p:notes>
+</file>
+
+<file path=ppt/notesSlides/notesSlide15.xml><?xml version="1.0" encoding="utf-8"?>
+<p:notes xmlns:a="http://schemas.openxmlformats.org/drawingml/2006/main" xmlns:r="http://schemas.openxmlformats.org/officeDocument/2006/relationships" xmlns:p="http://schemas.openxmlformats.org/presentationml/2006/main">
+  <p:cSld>
+    <p:spTree>
+      <p:nvGrpSpPr>
+        <p:cNvPr id="1" name=""/>
+        <p:cNvGrpSpPr/>
+        <p:nvPr/>
+      </p:nvGrpSpPr>
+      <p:grpSpPr>
+        <a:xfrm>
+          <a:off x="0" y="0"/>
+          <a:ext cx="0" cy="0"/>
+          <a:chOff x="0" y="0"/>
+          <a:chExt cx="0" cy="0"/>
+        </a:xfrm>
+      </p:grpSpPr>
+      <p:sp>
+        <p:nvSpPr>
+          <p:cNvPr id="2" name="Slide Image Placeholder 1"/>
+          <p:cNvSpPr>
+            <a:spLocks noGrp="1" noRot="1" noChangeAspect="1"/>
+          </p:cNvSpPr>
+          <p:nvPr>
+            <p:ph type="sldImg"/>
+          </p:nvPr>
+        </p:nvSpPr>
+        <p:spPr/>
+      </p:sp>
+      <p:sp>
+        <p:nvSpPr>
+          <p:cNvPr id="3" name="Notes Placeholder 2"/>
+          <p:cNvSpPr>
+            <a:spLocks noGrp="1"/>
+          </p:cNvSpPr>
+          <p:nvPr>
+            <p:ph type="body" idx="1"/>
+          </p:nvPr>
+        </p:nvSpPr>
+        <p:spPr/>
+        <p:txBody>
+          <a:bodyPr/>
+          <a:lstStyle/>
+          <a:p>
+            <a:r>
+              <a:rPr lang="en-US" dirty="0"/>
+              <a:t>Cover:
+• Recap: navigator + template-screen + how prefill/submit and live dropdowns work
+• Open the floor for questions
+That's the full picture of how your app will talk to navigator and template-screen. Let's open it up — happy to go deeper into any endpoint, the sequence diagram, or the prefill/submit and live-dropdown mechanisms specifically, since that's usually where integration questions come up.</a:t>
+            </a:r>
+            <a:endParaRPr lang="en-US" dirty="0"/>
+          </a:p>
+        </p:txBody>
+      </p:sp>
+      <p:sp>
+        <p:nvSpPr>
+          <p:cNvPr id="4" name="Slide Number Placeholder 3"/>
+          <p:cNvSpPr>
+            <a:spLocks noGrp="1"/>
+          </p:cNvSpPr>
+          <p:nvPr>
+            <p:ph type="sldNum" sz="quarter" idx="10"/>
+          </p:nvPr>
+        </p:nvSpPr>
+        <p:spPr/>
+        <p:txBody>
+          <a:bodyPr/>
+          <a:lstStyle/>
+          <a:p>
+            <a:fld id="{F7021451-1387-4CA6-816F-3879F97B5CBC}" type="slidenum">
+              <a:rPr lang="en-US"/>
+              <a:t>15</a:t>
             </a:fld>
             <a:endParaRPr lang="en-US"/>
           </a:p>
@@ -1441,10 +1536,11 @@
               <a:rPr lang="en-US" dirty="0"/>
               <a:t>Cover:
 • Navigator is fetched once, right at the start
-• Loop: resolve screenCode → fetch template-screen → prefill → submit → next screenCode
+• Loop: resolve screenCode → fetch template-screen → (optionally fetch live dropdown options) → prefill → submit → next screenCode
+• Prefill is now a direct spread of orchestrator variables — no CMS binding lookup
 • Orchestrator start/submit compressed so the two gold CMS calls stand out
 • Loop repeats until a terminal screen is reached
-Here's the full loop end to end. Navigator is fetched once, right at the start, purely to build a lookup table of screenCode to route. From there, the pattern repeats for every step: the orchestrator tells the app which screenCode is next, the app resolves that to a route and fetches that screen's template-screen config from the CMS, the user fills the form, and on submit the app sends the data back to the orchestrator, which returns the next screenCode. I've compressed the orchestrator's start and submit calls into single boxes here so the two CMS calls — the ones you're integrating against — stand out in gold.</a:t>
+Here's the full loop end to end. Navigator is fetched once, right at the start, purely to build a lookup table of screenCode to route. From there, the pattern repeats for every step: the orchestrator tells the app which screenCode is next, the app resolves that to a route and fetches that screen's template-screen config from the CMS. If a field is a dropdown backed by a live data source, there's an optional second CMS call to fetch that field's option list — separate from the main template-screen fetch. The form is then prefilled directly from the orchestrator's variables, the user submits, and the app sends the data back to the orchestrator, which returns the next screenCode. I've compressed the orchestrator's start and submit calls into single boxes here so the two CMS calls — the ones you're integrating against — stand out in gold.</a:t>
             </a:r>
             <a:endParaRPr lang="en-US" dirty="0"/>
           </a:p>
@@ -2397,7 +2493,7 @@
                 <a:ea typeface="Cambria" pitchFamily="34" charset="-122"/>
                 <a:cs typeface="Cambria" pitchFamily="34" charset="-120"/>
               </a:rPr>
-              <a:t>The defaultValue Contract</a:t>
+              <a:t>Prefilling &amp; Submitting Forms</a:t>
             </a:r>
             <a:endParaRPr lang="en-US" sz="3000" dirty="0"/>
           </a:p>
@@ -2436,7 +2532,7 @@
                 <a:ea typeface="Calibri" pitchFamily="34" charset="-122"/>
                 <a:cs typeface="Calibri" pitchFamily="34" charset="-120"/>
               </a:rPr>
-              <a:t>The one field that matters most for integration.</a:t>
+              <a:t>No CMS-authored binding field needed — canonical naming does the work.</a:t>
             </a:r>
             <a:endParaRPr lang="en-US" sz="1500" dirty="0"/>
           </a:p>
@@ -2579,7 +2675,7 @@
               <a:buNone/>
             </a:pPr>
             <a:r>
-              <a:rPr lang="en-US" sz="1250" b="1" dirty="0">
+              <a:rPr lang="en-US" sz="1150" b="1" dirty="0">
                 <a:solidFill>
                   <a:srgbClr val="D9A441"/>
                 </a:solidFill>
@@ -2587,7 +2683,7 @@
                 <a:ea typeface="Courier New" pitchFamily="34" charset="-122"/>
                 <a:cs typeface="Courier New" pitchFamily="34" charset="-120"/>
               </a:rPr>
-              <a:t>defaultValue</a:t>
+              <a:t>useForm({ defaultValues: { ...variables } })</a:t>
             </a:r>
             <a:endParaRPr lang="en-US" sz="1250" dirty="0"/>
           </a:p>
@@ -2604,7 +2700,7 @@
                 <a:ea typeface="Calibri" pitchFamily="34" charset="-122"/>
                 <a:cs typeface="Calibri" pitchFamily="34" charset="-120"/>
               </a:rPr>
-              <a:t>is either a static string, or a binding key matching a variable name from the orchestrator's session state.</a:t>
+              <a:t>The orchestrator's variables are keyed by canonical UPPER_SNAKE_CASE names that already match your form's field names — prefill is a direct spread, not a lookup.</a:t>
             </a:r>
             <a:endParaRPr lang="en-US" sz="1250" dirty="0"/>
           </a:p>
@@ -2747,6 +2843,23 @@
               <a:buNone/>
             </a:pPr>
             <a:r>
+              <a:rPr lang="en-US" sz="1150" b="1" dirty="0">
+                <a:solidFill>
+                  <a:srgbClr val="D9A441"/>
+                </a:solidFill>
+                <a:latin typeface="Courier New" pitchFamily="34" charset="0"/>
+                <a:ea typeface="Courier New" pitchFamily="34" charset="-122"/>
+                <a:cs typeface="Courier New" pitchFamily="34" charset="-120"/>
+              </a:rPr>
+              <a:t>buildSubmitPayload(values, components)</a:t>
+            </a:r>
+            <a:endParaRPr lang="en-US" sz="1250" dirty="0"/>
+          </a:p>
+          <a:p>
+            <a:pPr indent="0" marL="0">
+              <a:buNone/>
+            </a:pPr>
+            <a:r>
               <a:rPr lang="en-US" sz="1250" dirty="0">
                 <a:solidFill>
                   <a:srgbClr val="CADCFC"/>
@@ -2755,7 +2868,7 @@
                 <a:ea typeface="Calibri" pitchFamily="34" charset="-122"/>
                 <a:cs typeface="Calibri" pitchFamily="34" charset="-120"/>
               </a:rPr>
-              <a:t>The same bindings map your form's local field names back to the orchestrator's canonical variable names before you POST the submit payload.</a:t>
+              <a:t>still remaps keys to the canonical names before POST — but since keys are usually already canonical, this is typically a passthrough now, kept as a safety net.</a:t>
             </a:r>
             <a:endParaRPr lang="en-US" sz="1250" dirty="0"/>
           </a:p>
@@ -2769,31 +2882,70 @@
         </p:nvSpPr>
         <p:spPr>
           <a:xfrm>
-            <a:off x="548640" y="6446520"/>
-            <a:ext cx="6400800" cy="274320"/>
-          </a:xfrm>
-          <a:prstGeom prst="rect">
-            <a:avLst/>
-          </a:prstGeom>
-          <a:noFill/>
-          <a:ln/>
-        </p:spPr>
-        <p:txBody>
-          <a:bodyPr wrap="square" lIns="0" tIns="0" rIns="0" bIns="0" rtlCol="0" anchor="ctr"/>
-          <a:lstStyle/>
-          <a:p>
-            <a:pPr indent="0" marL="0">
-              <a:buNone/>
-            </a:pPr>
-            <a:r>
-              <a:rPr lang="en-US" sz="1000" dirty="0">
-                <a:solidFill>
-                  <a:srgbClr val="5B6B8C"/>
+            <a:off x="548640" y="5669280"/>
+            <a:ext cx="11094415" cy="411480"/>
+          </a:xfrm>
+          <a:prstGeom prst="rect">
+            <a:avLst/>
+          </a:prstGeom>
+          <a:noFill/>
+          <a:ln/>
+        </p:spPr>
+        <p:txBody>
+          <a:bodyPr wrap="square" lIns="0" tIns="0" rIns="0" bIns="0" rtlCol="0" anchor="ctr"/>
+          <a:lstStyle/>
+          <a:p>
+            <a:pPr algn="ctr" indent="0" marL="0">
+              <a:buNone/>
+            </a:pPr>
+            <a:r>
+              <a:rPr lang="en-US" sz="1150" i="1" dirty="0">
+                <a:solidFill>
+                  <a:srgbClr val="CADCFC"/>
                 </a:solidFill>
                 <a:latin typeface="Calibri" pitchFamily="34" charset="0"/>
                 <a:ea typeface="Calibri" pitchFamily="34" charset="-122"/>
                 <a:cs typeface="Calibri" pitchFamily="34" charset="-120"/>
               </a:rPr>
+              <a:t>This replaces the old CMS-authored defaultValue binding field, which has been removed from the component schemas.</a:t>
+            </a:r>
+            <a:endParaRPr lang="en-US" sz="1150" dirty="0"/>
+          </a:p>
+        </p:txBody>
+      </p:sp>
+      <p:sp>
+        <p:nvSpPr>
+          <p:cNvPr id="16" name="Text 12"/>
+          <p:cNvSpPr/>
+          <p:nvPr/>
+        </p:nvSpPr>
+        <p:spPr>
+          <a:xfrm>
+            <a:off x="548640" y="6446520"/>
+            <a:ext cx="6400800" cy="274320"/>
+          </a:xfrm>
+          <a:prstGeom prst="rect">
+            <a:avLst/>
+          </a:prstGeom>
+          <a:noFill/>
+          <a:ln/>
+        </p:spPr>
+        <p:txBody>
+          <a:bodyPr wrap="square" lIns="0" tIns="0" rIns="0" bIns="0" rtlCol="0" anchor="ctr"/>
+          <a:lstStyle/>
+          <a:p>
+            <a:pPr indent="0" marL="0">
+              <a:buNone/>
+            </a:pPr>
+            <a:r>
+              <a:rPr lang="en-US" sz="1000" dirty="0">
+                <a:solidFill>
+                  <a:srgbClr val="5B6B8C"/>
+                </a:solidFill>
+                <a:latin typeface="Calibri" pitchFamily="34" charset="0"/>
+                <a:ea typeface="Calibri" pitchFamily="34" charset="-122"/>
+                <a:cs typeface="Calibri" pitchFamily="34" charset="-120"/>
+              </a:rPr>
               <a:t>Navigator &amp; Template-Screen — Integration Guide</a:t>
             </a:r>
             <a:endParaRPr lang="en-US" sz="1000" dirty="0"/>
@@ -2802,7 +2954,7 @@
       </p:sp>
       <p:sp>
         <p:nvSpPr>
-          <p:cNvPr id="16" name="Text 12"/>
+          <p:cNvPr id="17" name="Text 13"/>
           <p:cNvSpPr/>
           <p:nvPr/>
         </p:nvSpPr>
@@ -2943,7 +3095,7 @@
                 <a:ea typeface="Cambria" pitchFamily="34" charset="-122"/>
                 <a:cs typeface="Cambria" pitchFamily="34" charset="-120"/>
               </a:rPr>
-              <a:t>Dropdown Relations &amp; Hidden Components</a:t>
+              <a:t>Live Dropdown Data Sources</a:t>
             </a:r>
             <a:endParaRPr lang="en-US" sz="3000" dirty="0"/>
           </a:p>
@@ -2951,22 +3103,61 @@
       </p:sp>
       <p:sp>
         <p:nvSpPr>
-          <p:cNvPr id="4" name="Shape 2"/>
-          <p:cNvSpPr/>
-          <p:nvPr/>
-        </p:nvSpPr>
-        <p:spPr>
-          <a:xfrm>
-            <a:off x="548640" y="1508760"/>
-            <a:ext cx="5394960" cy="4480560"/>
+          <p:cNvPr id="4" name="Text 2"/>
+          <p:cNvSpPr/>
+          <p:nvPr/>
+        </p:nvSpPr>
+        <p:spPr>
+          <a:xfrm>
+            <a:off x="548640" y="1371600"/>
+            <a:ext cx="11094415" cy="457200"/>
+          </a:xfrm>
+          <a:prstGeom prst="rect">
+            <a:avLst/>
+          </a:prstGeom>
+          <a:noFill/>
+          <a:ln/>
+        </p:spPr>
+        <p:txBody>
+          <a:bodyPr wrap="square" lIns="0" tIns="0" rIns="0" bIns="0" rtlCol="0" anchor="ctr"/>
+          <a:lstStyle/>
+          <a:p>
+            <a:pPr indent="0" marL="0">
+              <a:buNone/>
+            </a:pPr>
+            <a:r>
+              <a:rPr lang="en-US" sz="1450" dirty="0">
+                <a:solidFill>
+                  <a:srgbClr val="20264A"/>
+                </a:solidFill>
+                <a:latin typeface="Calibri" pitchFamily="34" charset="0"/>
+                <a:ea typeface="Calibri" pitchFamily="34" charset="-122"/>
+                <a:cs typeface="Calibri" pitchFamily="34" charset="-120"/>
+              </a:rPr>
+              <a:t>Not every dropdown's options come back in the template-screen response.</a:t>
+            </a:r>
+            <a:endParaRPr lang="en-US" sz="1450" dirty="0"/>
+          </a:p>
+        </p:txBody>
+      </p:sp>
+      <p:sp>
+        <p:nvSpPr>
+          <p:cNvPr id="5" name="Shape 3"/>
+          <p:cNvSpPr/>
+          <p:nvPr/>
+        </p:nvSpPr>
+        <p:spPr>
+          <a:xfrm>
+            <a:off x="548640" y="2011680"/>
+            <a:ext cx="11094415" cy="4023360"/>
           </a:xfrm>
           <a:prstGeom prst="roundRect">
             <a:avLst>
-              <a:gd name="adj" fmla="val 1633"/>
+              <a:gd name="adj" fmla="val 1818"/>
             </a:avLst>
           </a:prstGeom>
           <a:solidFill>
-            <a:srgbClr val="F4F7FD"/>
+            <a:srgbClr val="CADCFC"/>
           </a:solidFill>
           <a:ln/>
           <a:effectLst>
@@ -2980,27 +3171,27 @@
       </p:sp>
       <p:sp>
         <p:nvSpPr>
-          <p:cNvPr id="5" name="Shape 3"/>
-          <p:cNvSpPr/>
-          <p:nvPr/>
-        </p:nvSpPr>
-        <p:spPr>
-          <a:xfrm>
-            <a:off x="822960" y="1783080"/>
-            <a:ext cx="640080" cy="640080"/>
+          <p:cNvPr id="6" name="Shape 4"/>
+          <p:cNvSpPr/>
+          <p:nvPr/>
+        </p:nvSpPr>
+        <p:spPr>
+          <a:xfrm>
+            <a:off x="914400" y="2331720"/>
+            <a:ext cx="777240" cy="777240"/>
           </a:xfrm>
           <a:prstGeom prst="ellipse">
             <a:avLst/>
           </a:prstGeom>
           <a:solidFill>
-            <a:srgbClr val="CADCFC"/>
+            <a:srgbClr val="FFFFFF"/>
           </a:solidFill>
           <a:ln/>
         </p:spPr>
       </p:sp>
       <p:pic>
         <p:nvPicPr>
-          <p:cNvPr id="6" name="Image 0" descr="preencoded.png">    </p:cNvPr>
+          <p:cNvPr id="7" name="Image 0" descr="preencoded.png">    </p:cNvPr>
           <p:cNvPicPr>
             <a:picLocks noChangeAspect="1"/>
           </p:cNvPicPr>
@@ -3014,8 +3205,8 @@
         </p:blipFill>
         <p:spPr>
           <a:xfrm>
-            <a:off x="989381" y="1949501"/>
-            <a:ext cx="307238" cy="307238"/>
+            <a:off x="1116482" y="2533802"/>
+            <a:ext cx="373075" cy="373075"/>
           </a:xfrm>
           <a:prstGeom prst="rect">
             <a:avLst/>
@@ -3024,30 +3215,30 @@
       </p:pic>
       <p:sp>
         <p:nvSpPr>
-          <p:cNvPr id="7" name="Text 4"/>
-          <p:cNvSpPr/>
-          <p:nvPr/>
-        </p:nvSpPr>
-        <p:spPr>
-          <a:xfrm>
-            <a:off x="1600200" y="1874520"/>
-            <a:ext cx="3566160" cy="457200"/>
-          </a:xfrm>
-          <a:prstGeom prst="rect">
-            <a:avLst/>
-          </a:prstGeom>
-          <a:noFill/>
-          <a:ln/>
-        </p:spPr>
-        <p:txBody>
-          <a:bodyPr wrap="square" lIns="0" tIns="0" rIns="0" bIns="0" rtlCol="0" anchor="ctr"/>
-          <a:lstStyle/>
-          <a:p>
-            <a:pPr indent="0" marL="0">
-              <a:buNone/>
-            </a:pPr>
-            <a:r>
-              <a:rPr lang="en-US" sz="1400" b="1" dirty="0">
+          <p:cNvPr id="8" name="Text 5"/>
+          <p:cNvSpPr/>
+          <p:nvPr/>
+        </p:nvSpPr>
+        <p:spPr>
+          <a:xfrm>
+            <a:off x="1920240" y="2377440"/>
+            <a:ext cx="9448495" cy="457200"/>
+          </a:xfrm>
+          <a:prstGeom prst="rect">
+            <a:avLst/>
+          </a:prstGeom>
+          <a:noFill/>
+          <a:ln/>
+        </p:spPr>
+        <p:txBody>
+          <a:bodyPr wrap="square" lIns="0" tIns="0" rIns="0" bIns="0" rtlCol="0" anchor="ctr"/>
+          <a:lstStyle/>
+          <a:p>
+            <a:pPr indent="0" marL="0">
+              <a:buNone/>
+            </a:pPr>
+            <a:r>
+              <a:rPr lang="en-US" sz="1500" b="1" dirty="0">
                 <a:solidFill>
                   <a:srgbClr val="1E2761"/>
                 </a:solidFill>
@@ -3055,26 +3246,26 @@
                 <a:ea typeface="Cambria" pitchFamily="34" charset="-122"/>
                 <a:cs typeface="Cambria" pitchFamily="34" charset="-120"/>
               </a:rPr>
-              <a:t>Dropdown options, resolved for you</a:t>
-            </a:r>
-            <a:endParaRPr lang="en-US" sz="1400" dirty="0"/>
-          </a:p>
-        </p:txBody>
-      </p:sp>
-      <p:sp>
-        <p:nvSpPr>
-          <p:cNvPr id="8" name="Shape 5"/>
-          <p:cNvSpPr/>
-          <p:nvPr/>
-        </p:nvSpPr>
-        <p:spPr>
-          <a:xfrm>
-            <a:off x="822960" y="2514600"/>
-            <a:ext cx="4846320" cy="1645920"/>
+              <a:t>Relationship &amp; payment-option pickers are live, not static</a:t>
+            </a:r>
+            <a:endParaRPr lang="en-US" sz="1500" dirty="0"/>
+          </a:p>
+        </p:txBody>
+      </p:sp>
+      <p:sp>
+        <p:nvSpPr>
+          <p:cNvPr id="9" name="Shape 6"/>
+          <p:cNvSpPr/>
+          <p:nvPr/>
+        </p:nvSpPr>
+        <p:spPr>
+          <a:xfrm>
+            <a:off x="914400" y="3063240"/>
+            <a:ext cx="10362895" cy="1920240"/>
           </a:xfrm>
           <a:prstGeom prst="roundRect">
             <a:avLst>
-              <a:gd name="adj" fmla="val 4444"/>
+              <a:gd name="adj" fmla="val 3810"/>
             </a:avLst>
           </a:prstGeom>
           <a:solidFill>
@@ -3092,14 +3283,14 @@
       </p:sp>
       <p:sp>
         <p:nvSpPr>
-          <p:cNvPr id="9" name="Text 6"/>
-          <p:cNvSpPr/>
-          <p:nvPr/>
-        </p:nvSpPr>
-        <p:spPr>
-          <a:xfrm>
-            <a:off x="1051560" y="2697480"/>
-            <a:ext cx="4389120" cy="1280160"/>
+          <p:cNvPr id="10" name="Text 7"/>
+          <p:cNvSpPr/>
+          <p:nvPr/>
+        </p:nvSpPr>
+        <p:spPr>
+          <a:xfrm>
+            <a:off x="1143000" y="3246120"/>
+            <a:ext cx="9905695" cy="1554480"/>
           </a:xfrm>
           <a:prstGeom prst="rect">
             <a:avLst/>
@@ -3118,7 +3309,7 @@
               <a:buNone/>
             </a:pPr>
             <a:r>
-              <a:rPr lang="en-US" sz="1150" dirty="0">
+              <a:rPr lang="en-US" sz="1250" dirty="0">
                 <a:solidFill>
                   <a:srgbClr val="CADCFC"/>
                 </a:solidFill>
@@ -3126,9 +3317,9 @@
                 <a:ea typeface="Courier New" pitchFamily="34" charset="-122"/>
                 <a:cs typeface="Courier New" pitchFamily="34" charset="-120"/>
               </a:rPr>
-              <a:t>dropdownComponent.values = [</a:t>
-            </a:r>
-            <a:endParaRPr lang="en-US" sz="1150" dirty="0"/>
+              <a:t>// detect it</a:t>
+            </a:r>
+            <a:endParaRPr lang="en-US" sz="1250" dirty="0"/>
           </a:p>
           <a:p>
             <a:pPr indent="0" marL="0">
@@ -3138,7 +3329,7 @@
               <a:buNone/>
             </a:pPr>
             <a:r>
-              <a:rPr lang="en-US" sz="1150" dirty="0">
+              <a:rPr lang="en-US" sz="1250" dirty="0">
                 <a:solidFill>
                   <a:srgbClr val="CADCFC"/>
                 </a:solidFill>
@@ -3146,9 +3337,9 @@
                 <a:ea typeface="Courier New" pitchFamily="34" charset="-122"/>
                 <a:cs typeface="Courier New" pitchFamily="34" charset="-120"/>
               </a:rPr>
-              <a:t>  { displayValue: "Home",   value: "home"   },</a:t>
-            </a:r>
-            <a:endParaRPr lang="en-US" sz="1150" dirty="0"/>
+              <a:t>if (isDropdownComponent(component)) {</a:t>
+            </a:r>
+            <a:endParaRPr lang="en-US" sz="1250" dirty="0"/>
           </a:p>
           <a:p>
             <a:pPr indent="0" marL="0">
@@ -3158,7 +3349,7 @@
               <a:buNone/>
             </a:pPr>
             <a:r>
-              <a:rPr lang="en-US" sz="1150" dirty="0">
+              <a:rPr lang="en-US" sz="1250" dirty="0">
                 <a:solidFill>
                   <a:srgbClr val="CADCFC"/>
                 </a:solidFill>
@@ -3166,9 +3357,9 @@
                 <a:ea typeface="Courier New" pitchFamily="34" charset="-122"/>
                 <a:cs typeface="Courier New" pitchFamily="34" charset="-120"/>
               </a:rPr>
-              <a:t>  { displayValue: "Office", value: "office" }</a:t>
-            </a:r>
-            <a:endParaRPr lang="en-US" sz="1150" dirty="0"/>
+              <a:t>  // component.dataSource.url is set</a:t>
+            </a:r>
+            <a:endParaRPr lang="en-US" sz="1250" dirty="0"/>
           </a:p>
           <a:p>
             <a:pPr indent="0" marL="0">
@@ -3178,7 +3369,7 @@
               <a:buNone/>
             </a:pPr>
             <a:r>
-              <a:rPr lang="en-US" sz="1150" dirty="0">
+              <a:rPr lang="en-US" sz="1250" dirty="0">
                 <a:solidFill>
                   <a:srgbClr val="CADCFC"/>
                 </a:solidFill>
@@ -3186,38 +3377,101 @@
                 <a:ea typeface="Courier New" pitchFamily="34" charset="-122"/>
                 <a:cs typeface="Courier New" pitchFamily="34" charset="-120"/>
               </a:rPr>
-              <a:t>]</a:t>
-            </a:r>
-            <a:endParaRPr lang="en-US" sz="1150" dirty="0"/>
-          </a:p>
-        </p:txBody>
-      </p:sp>
-      <p:sp>
-        <p:nvSpPr>
-          <p:cNvPr id="10" name="Text 7"/>
-          <p:cNvSpPr/>
-          <p:nvPr/>
-        </p:nvSpPr>
-        <p:spPr>
-          <a:xfrm>
-            <a:off x="822960" y="4297680"/>
-            <a:ext cx="4846320" cy="1463040"/>
-          </a:xfrm>
-          <a:prstGeom prst="rect">
-            <a:avLst/>
-          </a:prstGeom>
-          <a:noFill/>
-          <a:ln/>
-        </p:spPr>
-        <p:txBody>
-          <a:bodyPr wrap="square" lIns="0" tIns="0" rIns="0" bIns="0" rtlCol="0" anchor="ctr"/>
-          <a:lstStyle/>
-          <a:p>
-            <a:pPr indent="0" marL="0">
-              <a:buNone/>
-            </a:pPr>
-            <a:r>
-              <a:rPr lang="en-US" sz="1200" dirty="0">
+              <a:t>}</a:t>
+            </a:r>
+            <a:endParaRPr lang="en-US" sz="1250" dirty="0"/>
+          </a:p>
+          <a:p>
+            <a:pPr indent="0" marL="0">
+              <a:lnSpc>
+                <a:spcPct val="115000"/>
+              </a:lnSpc>
+              <a:buNone/>
+            </a:pPr>
+            <a:endParaRPr lang="en-US" sz="1250" dirty="0"/>
+          </a:p>
+          <a:p>
+            <a:pPr indent="0" marL="0">
+              <a:lnSpc>
+                <a:spcPct val="115000"/>
+              </a:lnSpc>
+              <a:buNone/>
+            </a:pPr>
+            <a:r>
+              <a:rPr lang="en-US" sz="1250" dirty="0">
+                <a:solidFill>
+                  <a:srgbClr val="CADCFC"/>
+                </a:solidFill>
+                <a:latin typeface="Courier New" pitchFamily="34" charset="0"/>
+                <a:ea typeface="Courier New" pitchFamily="34" charset="-122"/>
+                <a:cs typeface="Courier New" pitchFamily="34" charset="-120"/>
+              </a:rPr>
+              <a:t>// fetch it — separate from the template-screen call</a:t>
+            </a:r>
+            <a:endParaRPr lang="en-US" sz="1250" dirty="0"/>
+          </a:p>
+          <a:p>
+            <a:pPr indent="0" marL="0">
+              <a:lnSpc>
+                <a:spcPct val="115000"/>
+              </a:lnSpc>
+              <a:buNone/>
+            </a:pPr>
+            <a:r>
+              <a:rPr lang="en-US" sz="1250" dirty="0">
+                <a:solidFill>
+                  <a:srgbClr val="CADCFC"/>
+                </a:solidFill>
+                <a:latin typeface="Courier New" pitchFamily="34" charset="0"/>
+                <a:ea typeface="Courier New" pitchFamily="34" charset="-122"/>
+                <a:cs typeface="Courier New" pitchFamily="34" charset="-120"/>
+              </a:rPr>
+              <a:t>useDropdownResponse(dataSource.url, template_id)</a:t>
+            </a:r>
+            <a:endParaRPr lang="en-US" sz="1250" dirty="0"/>
+          </a:p>
+        </p:txBody>
+      </p:sp>
+      <p:sp>
+        <p:nvSpPr>
+          <p:cNvPr id="11" name="Text 8"/>
+          <p:cNvSpPr/>
+          <p:nvPr/>
+        </p:nvSpPr>
+        <p:spPr>
+          <a:xfrm>
+            <a:off x="914400" y="5120640"/>
+            <a:ext cx="10362895" cy="731520"/>
+          </a:xfrm>
+          <a:prstGeom prst="rect">
+            <a:avLst/>
+          </a:prstGeom>
+          <a:noFill/>
+          <a:ln/>
+        </p:spPr>
+        <p:txBody>
+          <a:bodyPr wrap="square" lIns="0" tIns="0" rIns="0" bIns="0" rtlCol="0" anchor="ctr"/>
+          <a:lstStyle/>
+          <a:p>
+            <a:pPr indent="0" marL="0">
+              <a:buNone/>
+            </a:pPr>
+            <a:r>
+              <a:rPr lang="en-US" sz="1250" b="1" dirty="0">
+                <a:solidFill>
+                  <a:srgbClr val="1E2761"/>
+                </a:solidFill>
+                <a:latin typeface="Courier New" pitchFamily="34" charset="0"/>
+                <a:ea typeface="Courier New" pitchFamily="34" charset="-122"/>
+                <a:cs typeface="Courier New" pitchFamily="34" charset="-120"/>
+              </a:rPr>
+              <a:t>isDropdownComponent</a:t>
+            </a:r>
+            <a:pPr indent="0" marL="0">
+              <a:buNone/>
+            </a:pPr>
+            <a:r>
+              <a:rPr lang="en-US" sz="1250" dirty="0">
                 <a:solidFill>
                   <a:srgbClr val="20264A"/>
                 </a:solidFill>
@@ -3225,241 +3479,55 @@
                 <a:ea typeface="Calibri" pitchFamily="34" charset="-122"/>
                 <a:cs typeface="Calibri" pitchFamily="34" charset="-120"/>
               </a:rPr>
-              <a:t>No relation ID to chase — the CMS resolves the linked options group server-side and hands you a ready-to-render list.</a:t>
-            </a:r>
-            <a:endParaRPr lang="en-US" sz="1200" dirty="0"/>
-          </a:p>
-        </p:txBody>
-      </p:sp>
-      <p:sp>
-        <p:nvSpPr>
-          <p:cNvPr id="11" name="Shape 8"/>
-          <p:cNvSpPr/>
-          <p:nvPr/>
-        </p:nvSpPr>
-        <p:spPr>
-          <a:xfrm>
-            <a:off x="6400800" y="1508760"/>
-            <a:ext cx="5242255" cy="4480560"/>
-          </a:xfrm>
-          <a:prstGeom prst="roundRect">
-            <a:avLst>
-              <a:gd name="adj" fmla="val 1633"/>
-            </a:avLst>
-          </a:prstGeom>
-          <a:solidFill>
-            <a:srgbClr val="F4F7FD"/>
-          </a:solidFill>
-          <a:ln/>
-          <a:effectLst>
-            <a:outerShdw sx="100000" sy="100000" kx="0" ky="0" algn="bl" rotWithShape="0" blurRad="88900" dist="25400" dir="5400000">
-              <a:srgbClr val="000000">
-                <a:alpha val="10000"/>
-              </a:srgbClr>
-            </a:outerShdw>
-          </a:effectLst>
-        </p:spPr>
-      </p:sp>
-      <p:sp>
-        <p:nvSpPr>
-          <p:cNvPr id="12" name="Shape 9"/>
-          <p:cNvSpPr/>
-          <p:nvPr/>
-        </p:nvSpPr>
-        <p:spPr>
-          <a:xfrm>
-            <a:off x="6675120" y="1783080"/>
-            <a:ext cx="640080" cy="640080"/>
-          </a:xfrm>
-          <a:prstGeom prst="ellipse">
-            <a:avLst/>
-          </a:prstGeom>
-          <a:solidFill>
-            <a:srgbClr val="CADCFC"/>
-          </a:solidFill>
-          <a:ln/>
-        </p:spPr>
-      </p:sp>
-      <p:pic>
-        <p:nvPicPr>
-          <p:cNvPr id="13" name="Image 1" descr="preencoded.png">    </p:cNvPr>
-          <p:cNvPicPr>
-            <a:picLocks noChangeAspect="1"/>
-          </p:cNvPicPr>
-          <p:nvPr/>
-        </p:nvPicPr>
-        <p:blipFill>
-          <a:blip r:embed="rId2"/>
-          <a:stretch>
-            <a:fillRect/>
-          </a:stretch>
-        </p:blipFill>
-        <p:spPr>
-          <a:xfrm>
-            <a:off x="6841541" y="1949501"/>
-            <a:ext cx="307238" cy="307238"/>
-          </a:xfrm>
-          <a:prstGeom prst="rect">
-            <a:avLst/>
-          </a:prstGeom>
-        </p:spPr>
-      </p:pic>
-      <p:sp>
-        <p:nvSpPr>
-          <p:cNvPr id="14" name="Text 10"/>
-          <p:cNvSpPr/>
-          <p:nvPr/>
-        </p:nvSpPr>
-        <p:spPr>
-          <a:xfrm>
-            <a:off x="7452360" y="1874520"/>
-            <a:ext cx="3962095" cy="457200"/>
-          </a:xfrm>
-          <a:prstGeom prst="rect">
-            <a:avLst/>
-          </a:prstGeom>
-          <a:noFill/>
-          <a:ln/>
-        </p:spPr>
-        <p:txBody>
-          <a:bodyPr wrap="square" lIns="0" tIns="0" rIns="0" bIns="0" rtlCol="0" anchor="ctr"/>
-          <a:lstStyle/>
-          <a:p>
-            <a:pPr indent="0" marL="0">
-              <a:buNone/>
-            </a:pPr>
-            <a:r>
-              <a:rPr lang="en-US" sz="1400" b="1" dirty="0">
+              <a:t> (in </a:t>
+            </a:r>
+            <a:pPr indent="0" marL="0">
+              <a:buNone/>
+            </a:pPr>
+            <a:r>
+              <a:rPr lang="en-US" sz="1250" b="1" dirty="0">
                 <a:solidFill>
                   <a:srgbClr val="1E2761"/>
-                </a:solidFill>
-                <a:latin typeface="Cambria" pitchFamily="34" charset="0"/>
-                <a:ea typeface="Cambria" pitchFamily="34" charset="-122"/>
-                <a:cs typeface="Cambria" pitchFamily="34" charset="-120"/>
-              </a:rPr>
-              <a:t>You'll never see unfinished screens</a:t>
-            </a:r>
-            <a:endParaRPr lang="en-US" sz="1400" dirty="0"/>
-          </a:p>
-        </p:txBody>
-      </p:sp>
-      <p:sp>
-        <p:nvSpPr>
-          <p:cNvPr id="15" name="Shape 11"/>
-          <p:cNvSpPr/>
-          <p:nvPr/>
-        </p:nvSpPr>
-        <p:spPr>
-          <a:xfrm>
-            <a:off x="6675120" y="2514600"/>
-            <a:ext cx="4693615" cy="1097280"/>
-          </a:xfrm>
-          <a:prstGeom prst="roundRect">
-            <a:avLst>
-              <a:gd name="adj" fmla="val 6667"/>
-            </a:avLst>
-          </a:prstGeom>
-          <a:solidFill>
-            <a:srgbClr val="16204A"/>
-          </a:solidFill>
-          <a:ln/>
-          <a:effectLst>
-            <a:outerShdw sx="100000" sy="100000" kx="0" ky="0" algn="bl" rotWithShape="0" blurRad="101600" dist="38100" dir="5400000">
-              <a:srgbClr val="000000">
-                <a:alpha val="18000"/>
-              </a:srgbClr>
-            </a:outerShdw>
-          </a:effectLst>
-        </p:spPr>
-      </p:sp>
-      <p:sp>
-        <p:nvSpPr>
-          <p:cNvPr id="16" name="Text 12"/>
-          <p:cNvSpPr/>
-          <p:nvPr/>
-        </p:nvSpPr>
-        <p:spPr>
-          <a:xfrm>
-            <a:off x="6903720" y="2697480"/>
-            <a:ext cx="4236415" cy="731520"/>
-          </a:xfrm>
-          <a:prstGeom prst="rect">
-            <a:avLst/>
-          </a:prstGeom>
-          <a:noFill/>
-          <a:ln/>
-        </p:spPr>
-        <p:txBody>
-          <a:bodyPr wrap="square" lIns="0" tIns="0" rIns="0" bIns="0" rtlCol="0" anchor="t"/>
-          <a:lstStyle/>
-          <a:p>
-            <a:pPr indent="0" marL="0">
-              <a:lnSpc>
-                <a:spcPct val="115000"/>
-              </a:lnSpc>
-              <a:buNone/>
-            </a:pPr>
-            <a:r>
-              <a:rPr lang="en-US" sz="1150" dirty="0">
-                <a:solidFill>
-                  <a:srgbClr val="CADCFC"/>
                 </a:solidFill>
                 <a:latin typeface="Courier New" pitchFamily="34" charset="0"/>
                 <a:ea typeface="Courier New" pitchFamily="34" charset="-122"/>
                 <a:cs typeface="Courier New" pitchFamily="34" charset="-120"/>
               </a:rPr>
-              <a:t>// server-side, before you ever see it</a:t>
-            </a:r>
-            <a:endParaRPr lang="en-US" sz="1150" dirty="0"/>
-          </a:p>
-          <a:p>
-            <a:pPr indent="0" marL="0">
-              <a:lnSpc>
-                <a:spcPct val="115000"/>
-              </a:lnSpc>
-              <a:buNone/>
-            </a:pPr>
-            <a:r>
-              <a:rPr lang="en-US" sz="1150" dirty="0">
-                <a:solidFill>
-                  <a:srgbClr val="CADCFC"/>
+              <a:t>templateScreenApi.ts</a:t>
+            </a:r>
+            <a:pPr indent="0" marL="0">
+              <a:buNone/>
+            </a:pPr>
+            <a:r>
+              <a:rPr lang="en-US" sz="1250" dirty="0">
+                <a:solidFill>
+                  <a:srgbClr val="20264A"/>
+                </a:solidFill>
+                <a:latin typeface="Calibri" pitchFamily="34" charset="0"/>
+                <a:ea typeface="Calibri" pitchFamily="34" charset="-122"/>
+                <a:cs typeface="Calibri" pitchFamily="34" charset="-120"/>
+              </a:rPr>
+              <a:t>) flags these fields; </a:t>
+            </a:r>
+            <a:pPr indent="0" marL="0">
+              <a:buNone/>
+            </a:pPr>
+            <a:r>
+              <a:rPr lang="en-US" sz="1250" b="1" dirty="0">
+                <a:solidFill>
+                  <a:srgbClr val="1E2761"/>
                 </a:solidFill>
                 <a:latin typeface="Courier New" pitchFamily="34" charset="0"/>
                 <a:ea typeface="Courier New" pitchFamily="34" charset="-122"/>
                 <a:cs typeface="Courier New" pitchFamily="34" charset="-120"/>
               </a:rPr>
-              <a:t>if (component.hide === true) continue;</a:t>
-            </a:r>
-            <a:endParaRPr lang="en-US" sz="1150" dirty="0"/>
-          </a:p>
-        </p:txBody>
-      </p:sp>
-      <p:sp>
-        <p:nvSpPr>
-          <p:cNvPr id="17" name="Text 13"/>
-          <p:cNvSpPr/>
-          <p:nvPr/>
-        </p:nvSpPr>
-        <p:spPr>
-          <a:xfrm>
-            <a:off x="6675120" y="3840480"/>
-            <a:ext cx="4693615" cy="1920240"/>
-          </a:xfrm>
-          <a:prstGeom prst="rect">
-            <a:avLst/>
-          </a:prstGeom>
-          <a:noFill/>
-          <a:ln/>
-        </p:spPr>
-        <p:txBody>
-          <a:bodyPr wrap="square" lIns="0" tIns="0" rIns="0" bIns="0" rtlCol="0" anchor="ctr"/>
-          <a:lstStyle/>
-          <a:p>
-            <a:pPr indent="0" marL="0">
-              <a:buNone/>
-            </a:pPr>
-            <a:r>
-              <a:rPr lang="en-US" sz="1200" dirty="0">
+              <a:t>useDropdownResponse</a:t>
+            </a:r>
+            <a:pPr indent="0" marL="0">
+              <a:buNone/>
+            </a:pPr>
+            <a:r>
+              <a:rPr lang="en-US" sz="1250" dirty="0">
                 <a:solidFill>
                   <a:srgbClr val="20264A"/>
                 </a:solidFill>
@@ -3467,15 +3535,15 @@
                 <a:ea typeface="Calibri" pitchFamily="34" charset="-122"/>
                 <a:cs typeface="Calibri" pitchFamily="34" charset="-120"/>
               </a:rPr>
-              <a:t>Every component has a hidden flag, default true. Content editors can stage a screen in the CMS, and you'll only ever receive components explicitly marked visible.</a:t>
-            </a:r>
-            <a:endParaRPr lang="en-US" sz="1200" dirty="0"/>
-          </a:p>
-        </p:txBody>
-      </p:sp>
-      <p:sp>
-        <p:nvSpPr>
-          <p:cNvPr id="18" name="Text 14"/>
+              <a:t> fires the second request that fetches their live option list.</a:t>
+            </a:r>
+            <a:endParaRPr lang="en-US" sz="1250" dirty="0"/>
+          </a:p>
+        </p:txBody>
+      </p:sp>
+      <p:sp>
+        <p:nvSpPr>
+          <p:cNvPr id="12" name="Text 9"/>
           <p:cNvSpPr/>
           <p:nvPr/>
         </p:nvSpPr>
@@ -3514,7 +3582,7 @@
       </p:sp>
       <p:sp>
         <p:nvSpPr>
-          <p:cNvPr id="19" name="Text 15"/>
+          <p:cNvPr id="13" name="Text 10"/>
           <p:cNvSpPr/>
           <p:nvPr/>
         </p:nvSpPr>
@@ -3616,7 +3684,7 @@
                 <a:ea typeface="Calibri" pitchFamily="34" charset="-122"/>
                 <a:cs typeface="Calibri" pitchFamily="34" charset="-120"/>
               </a:rPr>
-              <a:t>REFERENCE</a:t>
+              <a:t>TEMPLATE-SCREEN API</a:t>
             </a:r>
             <a:endParaRPr lang="en-US" sz="1300" dirty="0"/>
           </a:p>
@@ -3655,6 +3723,718 @@
                 <a:ea typeface="Cambria" pitchFamily="34" charset="-122"/>
                 <a:cs typeface="Cambria" pitchFamily="34" charset="-120"/>
               </a:rPr>
+              <a:t>Static Dropdowns &amp; Hidden Components</a:t>
+            </a:r>
+            <a:endParaRPr lang="en-US" sz="3000" dirty="0"/>
+          </a:p>
+        </p:txBody>
+      </p:sp>
+      <p:sp>
+        <p:nvSpPr>
+          <p:cNvPr id="4" name="Shape 2"/>
+          <p:cNvSpPr/>
+          <p:nvPr/>
+        </p:nvSpPr>
+        <p:spPr>
+          <a:xfrm>
+            <a:off x="548640" y="1508760"/>
+            <a:ext cx="5394960" cy="4480560"/>
+          </a:xfrm>
+          <a:prstGeom prst="roundRect">
+            <a:avLst>
+              <a:gd name="adj" fmla="val 1633"/>
+            </a:avLst>
+          </a:prstGeom>
+          <a:solidFill>
+            <a:srgbClr val="F4F7FD"/>
+          </a:solidFill>
+          <a:ln/>
+          <a:effectLst>
+            <a:outerShdw sx="100000" sy="100000" kx="0" ky="0" algn="bl" rotWithShape="0" blurRad="88900" dist="25400" dir="5400000">
+              <a:srgbClr val="000000">
+                <a:alpha val="10000"/>
+              </a:srgbClr>
+            </a:outerShdw>
+          </a:effectLst>
+        </p:spPr>
+      </p:sp>
+      <p:sp>
+        <p:nvSpPr>
+          <p:cNvPr id="5" name="Shape 3"/>
+          <p:cNvSpPr/>
+          <p:nvPr/>
+        </p:nvSpPr>
+        <p:spPr>
+          <a:xfrm>
+            <a:off x="822960" y="1783080"/>
+            <a:ext cx="640080" cy="640080"/>
+          </a:xfrm>
+          <a:prstGeom prst="ellipse">
+            <a:avLst/>
+          </a:prstGeom>
+          <a:solidFill>
+            <a:srgbClr val="CADCFC"/>
+          </a:solidFill>
+          <a:ln/>
+        </p:spPr>
+      </p:sp>
+      <p:pic>
+        <p:nvPicPr>
+          <p:cNvPr id="6" name="Image 0" descr="preencoded.png">    </p:cNvPr>
+          <p:cNvPicPr>
+            <a:picLocks noChangeAspect="1"/>
+          </p:cNvPicPr>
+          <p:nvPr/>
+        </p:nvPicPr>
+        <p:blipFill>
+          <a:blip r:embed="rId1"/>
+          <a:stretch>
+            <a:fillRect/>
+          </a:stretch>
+        </p:blipFill>
+        <p:spPr>
+          <a:xfrm>
+            <a:off x="989381" y="1949501"/>
+            <a:ext cx="307238" cy="307238"/>
+          </a:xfrm>
+          <a:prstGeom prst="rect">
+            <a:avLst/>
+          </a:prstGeom>
+        </p:spPr>
+      </p:pic>
+      <p:sp>
+        <p:nvSpPr>
+          <p:cNvPr id="7" name="Text 4"/>
+          <p:cNvSpPr/>
+          <p:nvPr/>
+        </p:nvSpPr>
+        <p:spPr>
+          <a:xfrm>
+            <a:off x="1600200" y="1874520"/>
+            <a:ext cx="3566160" cy="457200"/>
+          </a:xfrm>
+          <a:prstGeom prst="rect">
+            <a:avLst/>
+          </a:prstGeom>
+          <a:noFill/>
+          <a:ln/>
+        </p:spPr>
+        <p:txBody>
+          <a:bodyPr wrap="square" lIns="0" tIns="0" rIns="0" bIns="0" rtlCol="0" anchor="ctr"/>
+          <a:lstStyle/>
+          <a:p>
+            <a:pPr indent="0" marL="0">
+              <a:buNone/>
+            </a:pPr>
+            <a:r>
+              <a:rPr lang="en-US" sz="1350" b="1" dirty="0">
+                <a:solidFill>
+                  <a:srgbClr val="1E2761"/>
+                </a:solidFill>
+                <a:latin typeface="Cambria" pitchFamily="34" charset="0"/>
+                <a:ea typeface="Cambria" pitchFamily="34" charset="-122"/>
+                <a:cs typeface="Cambria" pitchFamily="34" charset="-120"/>
+              </a:rPr>
+              <a:t>Static dropdowns: options resolved for you</a:t>
+            </a:r>
+            <a:endParaRPr lang="en-US" sz="1350" dirty="0"/>
+          </a:p>
+        </p:txBody>
+      </p:sp>
+      <p:sp>
+        <p:nvSpPr>
+          <p:cNvPr id="8" name="Shape 5"/>
+          <p:cNvSpPr/>
+          <p:nvPr/>
+        </p:nvSpPr>
+        <p:spPr>
+          <a:xfrm>
+            <a:off x="822960" y="2514600"/>
+            <a:ext cx="4846320" cy="1645920"/>
+          </a:xfrm>
+          <a:prstGeom prst="roundRect">
+            <a:avLst>
+              <a:gd name="adj" fmla="val 4444"/>
+            </a:avLst>
+          </a:prstGeom>
+          <a:solidFill>
+            <a:srgbClr val="16204A"/>
+          </a:solidFill>
+          <a:ln/>
+          <a:effectLst>
+            <a:outerShdw sx="100000" sy="100000" kx="0" ky="0" algn="bl" rotWithShape="0" blurRad="101600" dist="38100" dir="5400000">
+              <a:srgbClr val="000000">
+                <a:alpha val="18000"/>
+              </a:srgbClr>
+            </a:outerShdw>
+          </a:effectLst>
+        </p:spPr>
+      </p:sp>
+      <p:sp>
+        <p:nvSpPr>
+          <p:cNvPr id="9" name="Text 6"/>
+          <p:cNvSpPr/>
+          <p:nvPr/>
+        </p:nvSpPr>
+        <p:spPr>
+          <a:xfrm>
+            <a:off x="1051560" y="2697480"/>
+            <a:ext cx="4389120" cy="1280160"/>
+          </a:xfrm>
+          <a:prstGeom prst="rect">
+            <a:avLst/>
+          </a:prstGeom>
+          <a:noFill/>
+          <a:ln/>
+        </p:spPr>
+        <p:txBody>
+          <a:bodyPr wrap="square" lIns="0" tIns="0" rIns="0" bIns="0" rtlCol="0" anchor="t"/>
+          <a:lstStyle/>
+          <a:p>
+            <a:pPr indent="0" marL="0">
+              <a:lnSpc>
+                <a:spcPct val="115000"/>
+              </a:lnSpc>
+              <a:buNone/>
+            </a:pPr>
+            <a:r>
+              <a:rPr lang="en-US" sz="1150" dirty="0">
+                <a:solidFill>
+                  <a:srgbClr val="CADCFC"/>
+                </a:solidFill>
+                <a:latin typeface="Courier New" pitchFamily="34" charset="0"/>
+                <a:ea typeface="Courier New" pitchFamily="34" charset="-122"/>
+                <a:cs typeface="Courier New" pitchFamily="34" charset="-120"/>
+              </a:rPr>
+              <a:t>dropdownComponent.values = [</a:t>
+            </a:r>
+            <a:endParaRPr lang="en-US" sz="1150" dirty="0"/>
+          </a:p>
+          <a:p>
+            <a:pPr indent="0" marL="0">
+              <a:lnSpc>
+                <a:spcPct val="115000"/>
+              </a:lnSpc>
+              <a:buNone/>
+            </a:pPr>
+            <a:r>
+              <a:rPr lang="en-US" sz="1150" dirty="0">
+                <a:solidFill>
+                  <a:srgbClr val="CADCFC"/>
+                </a:solidFill>
+                <a:latin typeface="Courier New" pitchFamily="34" charset="0"/>
+                <a:ea typeface="Courier New" pitchFamily="34" charset="-122"/>
+                <a:cs typeface="Courier New" pitchFamily="34" charset="-120"/>
+              </a:rPr>
+              <a:t>  { displayValue: "Home",   value: "home"   },</a:t>
+            </a:r>
+            <a:endParaRPr lang="en-US" sz="1150" dirty="0"/>
+          </a:p>
+          <a:p>
+            <a:pPr indent="0" marL="0">
+              <a:lnSpc>
+                <a:spcPct val="115000"/>
+              </a:lnSpc>
+              <a:buNone/>
+            </a:pPr>
+            <a:r>
+              <a:rPr lang="en-US" sz="1150" dirty="0">
+                <a:solidFill>
+                  <a:srgbClr val="CADCFC"/>
+                </a:solidFill>
+                <a:latin typeface="Courier New" pitchFamily="34" charset="0"/>
+                <a:ea typeface="Courier New" pitchFamily="34" charset="-122"/>
+                <a:cs typeface="Courier New" pitchFamily="34" charset="-120"/>
+              </a:rPr>
+              <a:t>  { displayValue: "Office", value: "office" }</a:t>
+            </a:r>
+            <a:endParaRPr lang="en-US" sz="1150" dirty="0"/>
+          </a:p>
+          <a:p>
+            <a:pPr indent="0" marL="0">
+              <a:lnSpc>
+                <a:spcPct val="115000"/>
+              </a:lnSpc>
+              <a:buNone/>
+            </a:pPr>
+            <a:r>
+              <a:rPr lang="en-US" sz="1150" dirty="0">
+                <a:solidFill>
+                  <a:srgbClr val="CADCFC"/>
+                </a:solidFill>
+                <a:latin typeface="Courier New" pitchFamily="34" charset="0"/>
+                <a:ea typeface="Courier New" pitchFamily="34" charset="-122"/>
+                <a:cs typeface="Courier New" pitchFamily="34" charset="-120"/>
+              </a:rPr>
+              <a:t>]</a:t>
+            </a:r>
+            <a:endParaRPr lang="en-US" sz="1150" dirty="0"/>
+          </a:p>
+        </p:txBody>
+      </p:sp>
+      <p:sp>
+        <p:nvSpPr>
+          <p:cNvPr id="10" name="Text 7"/>
+          <p:cNvSpPr/>
+          <p:nvPr/>
+        </p:nvSpPr>
+        <p:spPr>
+          <a:xfrm>
+            <a:off x="822960" y="4297680"/>
+            <a:ext cx="4846320" cy="1463040"/>
+          </a:xfrm>
+          <a:prstGeom prst="rect">
+            <a:avLst/>
+          </a:prstGeom>
+          <a:noFill/>
+          <a:ln/>
+        </p:spPr>
+        <p:txBody>
+          <a:bodyPr wrap="square" lIns="0" tIns="0" rIns="0" bIns="0" rtlCol="0" anchor="ctr"/>
+          <a:lstStyle/>
+          <a:p>
+            <a:pPr indent="0" marL="0">
+              <a:buNone/>
+            </a:pPr>
+            <a:r>
+              <a:rPr lang="en-US" sz="1200" dirty="0">
+                <a:solidFill>
+                  <a:srgbClr val="20264A"/>
+                </a:solidFill>
+                <a:latin typeface="Calibri" pitchFamily="34" charset="0"/>
+                <a:ea typeface="Calibri" pitchFamily="34" charset="-122"/>
+                <a:cs typeface="Calibri" pitchFamily="34" charset="-120"/>
+              </a:rPr>
+              <a:t>Unlike the live dropdowns on the previous slide, these come pre-resolved: the CMS resolves the linked options group server-side and hands you a ready-to-render list in the same response.</a:t>
+            </a:r>
+            <a:endParaRPr lang="en-US" sz="1200" dirty="0"/>
+          </a:p>
+        </p:txBody>
+      </p:sp>
+      <p:sp>
+        <p:nvSpPr>
+          <p:cNvPr id="11" name="Shape 8"/>
+          <p:cNvSpPr/>
+          <p:nvPr/>
+        </p:nvSpPr>
+        <p:spPr>
+          <a:xfrm>
+            <a:off x="6400800" y="1508760"/>
+            <a:ext cx="5242255" cy="4480560"/>
+          </a:xfrm>
+          <a:prstGeom prst="roundRect">
+            <a:avLst>
+              <a:gd name="adj" fmla="val 1633"/>
+            </a:avLst>
+          </a:prstGeom>
+          <a:solidFill>
+            <a:srgbClr val="F4F7FD"/>
+          </a:solidFill>
+          <a:ln/>
+          <a:effectLst>
+            <a:outerShdw sx="100000" sy="100000" kx="0" ky="0" algn="bl" rotWithShape="0" blurRad="88900" dist="25400" dir="5400000">
+              <a:srgbClr val="000000">
+                <a:alpha val="10000"/>
+              </a:srgbClr>
+            </a:outerShdw>
+          </a:effectLst>
+        </p:spPr>
+      </p:sp>
+      <p:sp>
+        <p:nvSpPr>
+          <p:cNvPr id="12" name="Shape 9"/>
+          <p:cNvSpPr/>
+          <p:nvPr/>
+        </p:nvSpPr>
+        <p:spPr>
+          <a:xfrm>
+            <a:off x="6675120" y="1783080"/>
+            <a:ext cx="640080" cy="640080"/>
+          </a:xfrm>
+          <a:prstGeom prst="ellipse">
+            <a:avLst/>
+          </a:prstGeom>
+          <a:solidFill>
+            <a:srgbClr val="CADCFC"/>
+          </a:solidFill>
+          <a:ln/>
+        </p:spPr>
+      </p:sp>
+      <p:pic>
+        <p:nvPicPr>
+          <p:cNvPr id="13" name="Image 1" descr="preencoded.png">    </p:cNvPr>
+          <p:cNvPicPr>
+            <a:picLocks noChangeAspect="1"/>
+          </p:cNvPicPr>
+          <p:nvPr/>
+        </p:nvPicPr>
+        <p:blipFill>
+          <a:blip r:embed="rId2"/>
+          <a:stretch>
+            <a:fillRect/>
+          </a:stretch>
+        </p:blipFill>
+        <p:spPr>
+          <a:xfrm>
+            <a:off x="6841541" y="1949501"/>
+            <a:ext cx="307238" cy="307238"/>
+          </a:xfrm>
+          <a:prstGeom prst="rect">
+            <a:avLst/>
+          </a:prstGeom>
+        </p:spPr>
+      </p:pic>
+      <p:sp>
+        <p:nvSpPr>
+          <p:cNvPr id="14" name="Text 10"/>
+          <p:cNvSpPr/>
+          <p:nvPr/>
+        </p:nvSpPr>
+        <p:spPr>
+          <a:xfrm>
+            <a:off x="7452360" y="1874520"/>
+            <a:ext cx="3962095" cy="457200"/>
+          </a:xfrm>
+          <a:prstGeom prst="rect">
+            <a:avLst/>
+          </a:prstGeom>
+          <a:noFill/>
+          <a:ln/>
+        </p:spPr>
+        <p:txBody>
+          <a:bodyPr wrap="square" lIns="0" tIns="0" rIns="0" bIns="0" rtlCol="0" anchor="ctr"/>
+          <a:lstStyle/>
+          <a:p>
+            <a:pPr indent="0" marL="0">
+              <a:buNone/>
+            </a:pPr>
+            <a:r>
+              <a:rPr lang="en-US" sz="1400" b="1" dirty="0">
+                <a:solidFill>
+                  <a:srgbClr val="1E2761"/>
+                </a:solidFill>
+                <a:latin typeface="Cambria" pitchFamily="34" charset="0"/>
+                <a:ea typeface="Cambria" pitchFamily="34" charset="-122"/>
+                <a:cs typeface="Cambria" pitchFamily="34" charset="-120"/>
+              </a:rPr>
+              <a:t>You'll never see unfinished screens</a:t>
+            </a:r>
+            <a:endParaRPr lang="en-US" sz="1400" dirty="0"/>
+          </a:p>
+        </p:txBody>
+      </p:sp>
+      <p:sp>
+        <p:nvSpPr>
+          <p:cNvPr id="15" name="Shape 11"/>
+          <p:cNvSpPr/>
+          <p:nvPr/>
+        </p:nvSpPr>
+        <p:spPr>
+          <a:xfrm>
+            <a:off x="6675120" y="2514600"/>
+            <a:ext cx="4693615" cy="1097280"/>
+          </a:xfrm>
+          <a:prstGeom prst="roundRect">
+            <a:avLst>
+              <a:gd name="adj" fmla="val 6667"/>
+            </a:avLst>
+          </a:prstGeom>
+          <a:solidFill>
+            <a:srgbClr val="16204A"/>
+          </a:solidFill>
+          <a:ln/>
+          <a:effectLst>
+            <a:outerShdw sx="100000" sy="100000" kx="0" ky="0" algn="bl" rotWithShape="0" blurRad="101600" dist="38100" dir="5400000">
+              <a:srgbClr val="000000">
+                <a:alpha val="18000"/>
+              </a:srgbClr>
+            </a:outerShdw>
+          </a:effectLst>
+        </p:spPr>
+      </p:sp>
+      <p:sp>
+        <p:nvSpPr>
+          <p:cNvPr id="16" name="Text 12"/>
+          <p:cNvSpPr/>
+          <p:nvPr/>
+        </p:nvSpPr>
+        <p:spPr>
+          <a:xfrm>
+            <a:off x="6903720" y="2697480"/>
+            <a:ext cx="4236415" cy="731520"/>
+          </a:xfrm>
+          <a:prstGeom prst="rect">
+            <a:avLst/>
+          </a:prstGeom>
+          <a:noFill/>
+          <a:ln/>
+        </p:spPr>
+        <p:txBody>
+          <a:bodyPr wrap="square" lIns="0" tIns="0" rIns="0" bIns="0" rtlCol="0" anchor="t"/>
+          <a:lstStyle/>
+          <a:p>
+            <a:pPr indent="0" marL="0">
+              <a:lnSpc>
+                <a:spcPct val="115000"/>
+              </a:lnSpc>
+              <a:buNone/>
+            </a:pPr>
+            <a:r>
+              <a:rPr lang="en-US" sz="1150" dirty="0">
+                <a:solidFill>
+                  <a:srgbClr val="CADCFC"/>
+                </a:solidFill>
+                <a:latin typeface="Courier New" pitchFamily="34" charset="0"/>
+                <a:ea typeface="Courier New" pitchFamily="34" charset="-122"/>
+                <a:cs typeface="Courier New" pitchFamily="34" charset="-120"/>
+              </a:rPr>
+              <a:t>// server-side, before you ever see it</a:t>
+            </a:r>
+            <a:endParaRPr lang="en-US" sz="1150" dirty="0"/>
+          </a:p>
+          <a:p>
+            <a:pPr indent="0" marL="0">
+              <a:lnSpc>
+                <a:spcPct val="115000"/>
+              </a:lnSpc>
+              <a:buNone/>
+            </a:pPr>
+            <a:r>
+              <a:rPr lang="en-US" sz="1150" dirty="0">
+                <a:solidFill>
+                  <a:srgbClr val="CADCFC"/>
+                </a:solidFill>
+                <a:latin typeface="Courier New" pitchFamily="34" charset="0"/>
+                <a:ea typeface="Courier New" pitchFamily="34" charset="-122"/>
+                <a:cs typeface="Courier New" pitchFamily="34" charset="-120"/>
+              </a:rPr>
+              <a:t>if (component.hide === true) continue;</a:t>
+            </a:r>
+            <a:endParaRPr lang="en-US" sz="1150" dirty="0"/>
+          </a:p>
+        </p:txBody>
+      </p:sp>
+      <p:sp>
+        <p:nvSpPr>
+          <p:cNvPr id="17" name="Text 13"/>
+          <p:cNvSpPr/>
+          <p:nvPr/>
+        </p:nvSpPr>
+        <p:spPr>
+          <a:xfrm>
+            <a:off x="6675120" y="3840480"/>
+            <a:ext cx="4693615" cy="1920240"/>
+          </a:xfrm>
+          <a:prstGeom prst="rect">
+            <a:avLst/>
+          </a:prstGeom>
+          <a:noFill/>
+          <a:ln/>
+        </p:spPr>
+        <p:txBody>
+          <a:bodyPr wrap="square" lIns="0" tIns="0" rIns="0" bIns="0" rtlCol="0" anchor="ctr"/>
+          <a:lstStyle/>
+          <a:p>
+            <a:pPr indent="0" marL="0">
+              <a:buNone/>
+            </a:pPr>
+            <a:r>
+              <a:rPr lang="en-US" sz="1200" dirty="0">
+                <a:solidFill>
+                  <a:srgbClr val="20264A"/>
+                </a:solidFill>
+                <a:latin typeface="Calibri" pitchFamily="34" charset="0"/>
+                <a:ea typeface="Calibri" pitchFamily="34" charset="-122"/>
+                <a:cs typeface="Calibri" pitchFamily="34" charset="-120"/>
+              </a:rPr>
+              <a:t>Every component has a hidden flag, default true. Content editors can stage a screen in the CMS, and you'll only ever receive components explicitly marked visible.</a:t>
+            </a:r>
+            <a:endParaRPr lang="en-US" sz="1200" dirty="0"/>
+          </a:p>
+        </p:txBody>
+      </p:sp>
+      <p:sp>
+        <p:nvSpPr>
+          <p:cNvPr id="18" name="Text 14"/>
+          <p:cNvSpPr/>
+          <p:nvPr/>
+        </p:nvSpPr>
+        <p:spPr>
+          <a:xfrm>
+            <a:off x="548640" y="6446520"/>
+            <a:ext cx="6400800" cy="274320"/>
+          </a:xfrm>
+          <a:prstGeom prst="rect">
+            <a:avLst/>
+          </a:prstGeom>
+          <a:noFill/>
+          <a:ln/>
+        </p:spPr>
+        <p:txBody>
+          <a:bodyPr wrap="square" lIns="0" tIns="0" rIns="0" bIns="0" rtlCol="0" anchor="ctr"/>
+          <a:lstStyle/>
+          <a:p>
+            <a:pPr indent="0" marL="0">
+              <a:buNone/>
+            </a:pPr>
+            <a:r>
+              <a:rPr lang="en-US" sz="1000" dirty="0">
+                <a:solidFill>
+                  <a:srgbClr val="5B6B8C"/>
+                </a:solidFill>
+                <a:latin typeface="Calibri" pitchFamily="34" charset="0"/>
+                <a:ea typeface="Calibri" pitchFamily="34" charset="-122"/>
+                <a:cs typeface="Calibri" pitchFamily="34" charset="-120"/>
+              </a:rPr>
+              <a:t>Navigator &amp; Template-Screen — Integration Guide</a:t>
+            </a:r>
+            <a:endParaRPr lang="en-US" sz="1000" dirty="0"/>
+          </a:p>
+        </p:txBody>
+      </p:sp>
+      <p:sp>
+        <p:nvSpPr>
+          <p:cNvPr id="19" name="Text 15"/>
+          <p:cNvSpPr/>
+          <p:nvPr/>
+        </p:nvSpPr>
+        <p:spPr>
+          <a:xfrm>
+            <a:off x="11185855" y="6446520"/>
+            <a:ext cx="457200" cy="274320"/>
+          </a:xfrm>
+          <a:prstGeom prst="rect">
+            <a:avLst/>
+          </a:prstGeom>
+          <a:noFill/>
+          <a:ln/>
+        </p:spPr>
+        <p:txBody>
+          <a:bodyPr wrap="square" lIns="0" tIns="0" rIns="0" bIns="0" rtlCol="0" anchor="ctr"/>
+          <a:lstStyle/>
+          <a:p>
+            <a:pPr algn="r" indent="0" marL="0">
+              <a:buNone/>
+            </a:pPr>
+            <a:r>
+              <a:rPr lang="en-US" sz="1000" dirty="0">
+                <a:solidFill>
+                  <a:srgbClr val="5B6B8C"/>
+                </a:solidFill>
+                <a:latin typeface="Calibri" pitchFamily="34" charset="0"/>
+                <a:ea typeface="Calibri" pitchFamily="34" charset="-122"/>
+                <a:cs typeface="Calibri" pitchFamily="34" charset="-120"/>
+              </a:rPr>
+              <a:t>12</a:t>
+            </a:r>
+            <a:endParaRPr lang="en-US" sz="1000" dirty="0"/>
+          </a:p>
+        </p:txBody>
+      </p:sp>
+    </p:spTree>
+  </p:cSld>
+  <p:clrMapOvr>
+    <a:masterClrMapping/>
+  </p:clrMapOvr>
+</p:sld>
+</file>
+
+<file path=ppt/slides/slide13.xml><?xml version="1.0" encoding="utf-8"?>
+<p:sld xmlns:a="http://schemas.openxmlformats.org/drawingml/2006/main" xmlns:r="http://schemas.openxmlformats.org/officeDocument/2006/relationships" xmlns:p="http://schemas.openxmlformats.org/presentationml/2006/main">
+  <p:cSld name="Slide 13">
+    <p:bg>
+      <p:bgPr>
+        <a:solidFill>
+          <a:srgbClr val="FFFFFF"/>
+        </a:solidFill>
+      </p:bgPr>
+    </p:bg>
+    <p:spTree>
+      <p:nvGrpSpPr>
+        <p:cNvPr id="1" name=""/>
+        <p:cNvGrpSpPr/>
+        <p:nvPr/>
+      </p:nvGrpSpPr>
+      <p:grpSpPr>
+        <a:xfrm>
+          <a:off x="0" y="0"/>
+          <a:ext cx="0" cy="0"/>
+          <a:chOff x="0" y="0"/>
+          <a:chExt cx="0" cy="0"/>
+        </a:xfrm>
+      </p:grpSpPr>
+      <p:sp>
+        <p:nvSpPr>
+          <p:cNvPr id="2" name="Text 0"/>
+          <p:cNvSpPr/>
+          <p:nvPr/>
+        </p:nvSpPr>
+        <p:spPr>
+          <a:xfrm>
+            <a:off x="548640" y="411480"/>
+            <a:ext cx="9144000" cy="320040"/>
+          </a:xfrm>
+          <a:prstGeom prst="rect">
+            <a:avLst/>
+          </a:prstGeom>
+          <a:noFill/>
+          <a:ln/>
+        </p:spPr>
+        <p:txBody>
+          <a:bodyPr wrap="square" lIns="0" tIns="0" rIns="0" bIns="0" rtlCol="0" anchor="ctr"/>
+          <a:lstStyle/>
+          <a:p>
+            <a:pPr indent="0" marL="0">
+              <a:buNone/>
+            </a:pPr>
+            <a:r>
+              <a:rPr lang="en-US" sz="1300" b="1" spc="200" kern="0" dirty="0">
+                <a:solidFill>
+                  <a:srgbClr val="D9A441"/>
+                </a:solidFill>
+                <a:latin typeface="Calibri" pitchFamily="34" charset="0"/>
+                <a:ea typeface="Calibri" pitchFamily="34" charset="-122"/>
+                <a:cs typeface="Calibri" pitchFamily="34" charset="-120"/>
+              </a:rPr>
+              <a:t>REFERENCE</a:t>
+            </a:r>
+            <a:endParaRPr lang="en-US" sz="1300" dirty="0"/>
+          </a:p>
+        </p:txBody>
+      </p:sp>
+      <p:sp>
+        <p:nvSpPr>
+          <p:cNvPr id="3" name="Text 1"/>
+          <p:cNvSpPr/>
+          <p:nvPr/>
+        </p:nvSpPr>
+        <p:spPr>
+          <a:xfrm>
+            <a:off x="548640" y="713232"/>
+            <a:ext cx="11094415" cy="822960"/>
+          </a:xfrm>
+          <a:prstGeom prst="rect">
+            <a:avLst/>
+          </a:prstGeom>
+          <a:noFill/>
+          <a:ln/>
+        </p:spPr>
+        <p:txBody>
+          <a:bodyPr wrap="square" lIns="0" tIns="0" rIns="0" bIns="0" rtlCol="0" anchor="ctr"/>
+          <a:lstStyle/>
+          <a:p>
+            <a:pPr indent="0" marL="0">
+              <a:buNone/>
+            </a:pPr>
+            <a:r>
+              <a:rPr lang="en-US" sz="3000" b="1" dirty="0">
+                <a:solidFill>
+                  <a:srgbClr val="1E2761"/>
+                </a:solidFill>
+                <a:latin typeface="Cambria" pitchFamily="34" charset="0"/>
+                <a:ea typeface="Cambria" pitchFamily="34" charset="-122"/>
+                <a:cs typeface="Cambria" pitchFamily="34" charset="-120"/>
+              </a:rPr>
               <a:t>Integration Contract Cheat-Sheet</a:t>
             </a:r>
             <a:endParaRPr lang="en-US" sz="3000" dirty="0"/>
@@ -3663,7 +4443,7 @@
       </p:sp>
       <p:graphicFrame>
         <p:nvGraphicFramePr>
-          <p:cNvPr id="13" name="Table 0"/>
+          <p:cNvPr id="14" name="Table 0"/>
           <p:cNvGraphicFramePr>
             <a:graphicFrameLocks noGrp="1"/>
           </p:cNvGraphicFramePr>
@@ -3676,8 +4456,8 @@
           </p:nvPr>
         </p:nvGraphicFramePr>
         <p:xfrm>
-          <a:off x="548640" y="1600200"/>
-          <a:ext cx="11094415" cy="1737360"/>
+          <a:off x="548640" y="1554480"/>
+          <a:ext cx="11094415" cy="2286000"/>
         </p:xfrm>
         <a:graphic>
           <a:graphicData uri="http://schemas.openxmlformats.org/drawingml/2006/table">
@@ -3688,7 +4468,7 @@
                 <a:gridCol w="1463040"/>
                 <a:gridCol w="5425135"/>
               </a:tblGrid>
-              <a:tr h="548640">
+              <a:tr h="530352">
                 <a:tc>
                   <a:txBody>
                     <a:bodyPr/>
@@ -3698,7 +4478,7 @@
                         <a:buNone/>
                       </a:pPr>
                       <a:r>
-                        <a:rPr lang="en-US" sz="1300" b="1" dirty="0">
+                        <a:rPr lang="en-US" sz="1200" b="1" dirty="0">
                           <a:solidFill>
                             <a:srgbClr val="FFFFFF"/>
                           </a:solidFill>
@@ -3708,7 +4488,7 @@
                         </a:rPr>
                         <a:t>Endpoint</a:t>
                       </a:r>
-                      <a:endParaRPr lang="en-US" sz="1300" dirty="0">
+                      <a:endParaRPr lang="en-US" sz="1200" dirty="0">
                         <a:latin typeface="Courier New" charset="0"/>
                         <a:ea typeface="Courier New" charset="0"/>
                         <a:cs typeface="Courier New" charset="0"/>
@@ -3766,7 +4546,7 @@
                         <a:buNone/>
                       </a:pPr>
                       <a:r>
-                        <a:rPr lang="en-US" sz="1300" b="1" dirty="0">
+                        <a:rPr lang="en-US" sz="1200" b="1" dirty="0">
                           <a:solidFill>
                             <a:srgbClr val="FFFFFF"/>
                           </a:solidFill>
@@ -3776,7 +4556,7 @@
                         </a:rPr>
                         <a:t>Method</a:t>
                       </a:r>
-                      <a:endParaRPr lang="en-US" sz="1300" dirty="0">
+                      <a:endParaRPr lang="en-US" sz="1200" dirty="0">
                         <a:latin typeface="Courier New" charset="0"/>
                         <a:ea typeface="Courier New" charset="0"/>
                         <a:cs typeface="Courier New" charset="0"/>
@@ -3834,7 +4614,7 @@
                         <a:buNone/>
                       </a:pPr>
                       <a:r>
-                        <a:rPr lang="en-US" sz="1300" b="1" dirty="0">
+                        <a:rPr lang="en-US" sz="1200" b="1" dirty="0">
                           <a:solidFill>
                             <a:srgbClr val="FFFFFF"/>
                           </a:solidFill>
@@ -3844,7 +4624,7 @@
                         </a:rPr>
                         <a:t>Returns</a:t>
                       </a:r>
-                      <a:endParaRPr lang="en-US" sz="1300" dirty="0">
+                      <a:endParaRPr lang="en-US" sz="1200" dirty="0">
                         <a:latin typeface="Courier New" charset="0"/>
                         <a:ea typeface="Courier New" charset="0"/>
                         <a:cs typeface="Courier New" charset="0"/>
@@ -3894,7 +4674,7 @@
                   </a:tcPr>
                 </a:tc>
               </a:tr>
-              <a:tr h="548640">
+              <a:tr h="530352">
                 <a:tc>
                   <a:txBody>
                     <a:bodyPr/>
@@ -3904,7 +4684,7 @@
                         <a:buNone/>
                       </a:pPr>
                       <a:r>
-                        <a:rPr lang="en-US" sz="1300" dirty="0">
+                        <a:rPr lang="en-US" sz="1200" dirty="0">
                           <a:solidFill>
                             <a:srgbClr val="20264A"/>
                           </a:solidFill>
@@ -3914,7 +4694,7 @@
                         </a:rPr>
                         <a:t>/navigators/:journeyCode</a:t>
                       </a:r>
-                      <a:endParaRPr lang="en-US" sz="1300" dirty="0">
+                      <a:endParaRPr lang="en-US" sz="1200" dirty="0">
                         <a:latin typeface="Courier New" charset="0"/>
                         <a:ea typeface="Courier New" charset="0"/>
                         <a:cs typeface="Courier New" charset="0"/>
@@ -3969,7 +4749,7 @@
                         <a:buNone/>
                       </a:pPr>
                       <a:r>
-                        <a:rPr lang="en-US" sz="1300" dirty="0">
+                        <a:rPr lang="en-US" sz="1200" dirty="0">
                           <a:solidFill>
                             <a:srgbClr val="20264A"/>
                           </a:solidFill>
@@ -3979,7 +4759,7 @@
                         </a:rPr>
                         <a:t>GET</a:t>
                       </a:r>
-                      <a:endParaRPr lang="en-US" sz="1300" dirty="0">
+                      <a:endParaRPr lang="en-US" sz="1200" dirty="0">
                         <a:latin typeface="Courier New" charset="0"/>
                         <a:ea typeface="Courier New" charset="0"/>
                         <a:cs typeface="Courier New" charset="0"/>
@@ -4034,7 +4814,7 @@
                         <a:buNone/>
                       </a:pPr>
                       <a:r>
-                        <a:rPr lang="en-US" sz="1300" dirty="0">
+                        <a:rPr lang="en-US" sz="1200" dirty="0">
                           <a:solidFill>
                             <a:srgbClr val="20264A"/>
                           </a:solidFill>
@@ -4044,7 +4824,7 @@
                         </a:rPr>
                         <a:t>Ordered [{ screenCode, screenName, sequence }]</a:t>
                       </a:r>
-                      <a:endParaRPr lang="en-US" sz="1300" dirty="0">
+                      <a:endParaRPr lang="en-US" sz="1200" dirty="0">
                         <a:latin typeface="Courier New" charset="0"/>
                         <a:ea typeface="Courier New" charset="0"/>
                         <a:cs typeface="Courier New" charset="0"/>
@@ -4091,7 +4871,7 @@
                   </a:tcPr>
                 </a:tc>
               </a:tr>
-              <a:tr h="548640">
+              <a:tr h="530352">
                 <a:tc>
                   <a:txBody>
                     <a:bodyPr/>
@@ -4101,7 +4881,7 @@
                         <a:buNone/>
                       </a:pPr>
                       <a:r>
-                        <a:rPr lang="en-US" sz="1300" dirty="0">
+                        <a:rPr lang="en-US" sz="1200" dirty="0">
                           <a:solidFill>
                             <a:srgbClr val="20264A"/>
                           </a:solidFill>
@@ -4111,7 +4891,7 @@
                         </a:rPr>
                         <a:t>/template-screens/:template_id</a:t>
                       </a:r>
-                      <a:endParaRPr lang="en-US" sz="1300" dirty="0">
+                      <a:endParaRPr lang="en-US" sz="1200" dirty="0">
                         <a:latin typeface="Courier New" charset="0"/>
                         <a:ea typeface="Courier New" charset="0"/>
                         <a:cs typeface="Courier New" charset="0"/>
@@ -4166,7 +4946,7 @@
                         <a:buNone/>
                       </a:pPr>
                       <a:r>
-                        <a:rPr lang="en-US" sz="1300" dirty="0">
+                        <a:rPr lang="en-US" sz="1200" dirty="0">
                           <a:solidFill>
                             <a:srgbClr val="20264A"/>
                           </a:solidFill>
@@ -4176,7 +4956,7 @@
                         </a:rPr>
                         <a:t>GET</a:t>
                       </a:r>
-                      <a:endParaRPr lang="en-US" sz="1300" dirty="0">
+                      <a:endParaRPr lang="en-US" sz="1200" dirty="0">
                         <a:latin typeface="Courier New" charset="0"/>
                         <a:ea typeface="Courier New" charset="0"/>
                         <a:cs typeface="Courier New" charset="0"/>
@@ -4231,7 +5011,7 @@
                         <a:buNone/>
                       </a:pPr>
                       <a:r>
-                        <a:rPr lang="en-US" sz="1300" dirty="0">
+                        <a:rPr lang="en-US" sz="1200" dirty="0">
                           <a:solidFill>
                             <a:srgbClr val="20264A"/>
                           </a:solidFill>
@@ -4239,9 +5019,206 @@
                           <a:ea typeface="Courier New" pitchFamily="34" charset="-122"/>
                           <a:cs typeface="Courier New" pitchFamily="34" charset="-120"/>
                         </a:rPr>
-                        <a:t>{ [componentId]: { ...fields, defaultValue } }</a:t>
+                        <a:t>{ [componentId]: { ...fields } }</a:t>
                       </a:r>
-                      <a:endParaRPr lang="en-US" sz="1300" dirty="0">
+                      <a:endParaRPr lang="en-US" sz="1200" dirty="0">
+                        <a:latin typeface="Courier New" charset="0"/>
+                        <a:ea typeface="Courier New" charset="0"/>
+                        <a:cs typeface="Courier New" charset="0"/>
+                      </a:endParaRPr>
+                    </a:p>
+                  </a:txBody>
+                  <a:tcPr marL="91440" marR="91440" marT="45720" marB="45720" anchor="ctr">
+                    <a:lnL w="9525" cap="flat" cmpd="sng" algn="ctr">
+                      <a:solidFill>
+                        <a:srgbClr val="E1E7F5"/>
+                      </a:solidFill>
+                      <a:prstDash val="solid"/>
+                      <a:round/>
+                      <a:headEnd type="none" w="med" len="med"/>
+                      <a:tailEnd type="none" w="med" len="med"/>
+                    </a:lnL>
+                    <a:lnR w="9525" cap="flat" cmpd="sng" algn="ctr">
+                      <a:solidFill>
+                        <a:srgbClr val="E1E7F5"/>
+                      </a:solidFill>
+                      <a:prstDash val="solid"/>
+                      <a:round/>
+                      <a:headEnd type="none" w="med" len="med"/>
+                      <a:tailEnd type="none" w="med" len="med"/>
+                    </a:lnR>
+                    <a:lnT w="9525" cap="flat" cmpd="sng" algn="ctr">
+                      <a:solidFill>
+                        <a:srgbClr val="E1E7F5"/>
+                      </a:solidFill>
+                      <a:prstDash val="solid"/>
+                      <a:round/>
+                      <a:headEnd type="none" w="med" len="med"/>
+                      <a:tailEnd type="none" w="med" len="med"/>
+                    </a:lnT>
+                    <a:lnB w="9525" cap="flat" cmpd="sng" algn="ctr">
+                      <a:solidFill>
+                        <a:srgbClr val="E1E7F5"/>
+                      </a:solidFill>
+                      <a:prstDash val="solid"/>
+                      <a:round/>
+                      <a:headEnd type="none" w="med" len="med"/>
+                      <a:tailEnd type="none" w="med" len="med"/>
+                    </a:lnB>
+                  </a:tcPr>
+                </a:tc>
+              </a:tr>
+              <a:tr h="530352">
+                <a:tc>
+                  <a:txBody>
+                    <a:bodyPr/>
+                    <a:lstStyle/>
+                    <a:p>
+                      <a:pPr indent="0" marL="0">
+                        <a:buNone/>
+                      </a:pPr>
+                      <a:r>
+                        <a:rPr lang="en-US" sz="1200" dirty="0">
+                          <a:solidFill>
+                            <a:srgbClr val="20264A"/>
+                          </a:solidFill>
+                          <a:latin typeface="Courier New" pitchFamily="34" charset="0"/>
+                          <a:ea typeface="Courier New" pitchFamily="34" charset="-122"/>
+                          <a:cs typeface="Courier New" pitchFamily="34" charset="-120"/>
+                        </a:rPr>
+                        <a:t>dataSource.url  (live dropdowns)</a:t>
+                      </a:r>
+                      <a:endParaRPr lang="en-US" sz="1200" dirty="0">
+                        <a:latin typeface="Courier New" charset="0"/>
+                        <a:ea typeface="Courier New" charset="0"/>
+                        <a:cs typeface="Courier New" charset="0"/>
+                      </a:endParaRPr>
+                    </a:p>
+                  </a:txBody>
+                  <a:tcPr marL="91440" marR="91440" marT="45720" marB="45720" anchor="ctr">
+                    <a:lnL w="9525" cap="flat" cmpd="sng" algn="ctr">
+                      <a:solidFill>
+                        <a:srgbClr val="E1E7F5"/>
+                      </a:solidFill>
+                      <a:prstDash val="solid"/>
+                      <a:round/>
+                      <a:headEnd type="none" w="med" len="med"/>
+                      <a:tailEnd type="none" w="med" len="med"/>
+                    </a:lnL>
+                    <a:lnR w="9525" cap="flat" cmpd="sng" algn="ctr">
+                      <a:solidFill>
+                        <a:srgbClr val="E1E7F5"/>
+                      </a:solidFill>
+                      <a:prstDash val="solid"/>
+                      <a:round/>
+                      <a:headEnd type="none" w="med" len="med"/>
+                      <a:tailEnd type="none" w="med" len="med"/>
+                    </a:lnR>
+                    <a:lnT w="9525" cap="flat" cmpd="sng" algn="ctr">
+                      <a:solidFill>
+                        <a:srgbClr val="E1E7F5"/>
+                      </a:solidFill>
+                      <a:prstDash val="solid"/>
+                      <a:round/>
+                      <a:headEnd type="none" w="med" len="med"/>
+                      <a:tailEnd type="none" w="med" len="med"/>
+                    </a:lnT>
+                    <a:lnB w="9525" cap="flat" cmpd="sng" algn="ctr">
+                      <a:solidFill>
+                        <a:srgbClr val="E1E7F5"/>
+                      </a:solidFill>
+                      <a:prstDash val="solid"/>
+                      <a:round/>
+                      <a:headEnd type="none" w="med" len="med"/>
+                      <a:tailEnd type="none" w="med" len="med"/>
+                    </a:lnB>
+                  </a:tcPr>
+                </a:tc>
+                <a:tc>
+                  <a:txBody>
+                    <a:bodyPr/>
+                    <a:lstStyle/>
+                    <a:p>
+                      <a:pPr indent="0" marL="0">
+                        <a:buNone/>
+                      </a:pPr>
+                      <a:r>
+                        <a:rPr lang="en-US" sz="1200" dirty="0">
+                          <a:solidFill>
+                            <a:srgbClr val="20264A"/>
+                          </a:solidFill>
+                          <a:latin typeface="Courier New" pitchFamily="34" charset="0"/>
+                          <a:ea typeface="Courier New" pitchFamily="34" charset="-122"/>
+                          <a:cs typeface="Courier New" pitchFamily="34" charset="-120"/>
+                        </a:rPr>
+                        <a:t>GET</a:t>
+                      </a:r>
+                      <a:endParaRPr lang="en-US" sz="1200" dirty="0">
+                        <a:latin typeface="Courier New" charset="0"/>
+                        <a:ea typeface="Courier New" charset="0"/>
+                        <a:cs typeface="Courier New" charset="0"/>
+                      </a:endParaRPr>
+                    </a:p>
+                  </a:txBody>
+                  <a:tcPr marL="91440" marR="91440" marT="45720" marB="45720" anchor="ctr">
+                    <a:lnL w="9525" cap="flat" cmpd="sng" algn="ctr">
+                      <a:solidFill>
+                        <a:srgbClr val="E1E7F5"/>
+                      </a:solidFill>
+                      <a:prstDash val="solid"/>
+                      <a:round/>
+                      <a:headEnd type="none" w="med" len="med"/>
+                      <a:tailEnd type="none" w="med" len="med"/>
+                    </a:lnL>
+                    <a:lnR w="9525" cap="flat" cmpd="sng" algn="ctr">
+                      <a:solidFill>
+                        <a:srgbClr val="E1E7F5"/>
+                      </a:solidFill>
+                      <a:prstDash val="solid"/>
+                      <a:round/>
+                      <a:headEnd type="none" w="med" len="med"/>
+                      <a:tailEnd type="none" w="med" len="med"/>
+                    </a:lnR>
+                    <a:lnT w="9525" cap="flat" cmpd="sng" algn="ctr">
+                      <a:solidFill>
+                        <a:srgbClr val="E1E7F5"/>
+                      </a:solidFill>
+                      <a:prstDash val="solid"/>
+                      <a:round/>
+                      <a:headEnd type="none" w="med" len="med"/>
+                      <a:tailEnd type="none" w="med" len="med"/>
+                    </a:lnT>
+                    <a:lnB w="9525" cap="flat" cmpd="sng" algn="ctr">
+                      <a:solidFill>
+                        <a:srgbClr val="E1E7F5"/>
+                      </a:solidFill>
+                      <a:prstDash val="solid"/>
+                      <a:round/>
+                      <a:headEnd type="none" w="med" len="med"/>
+                      <a:tailEnd type="none" w="med" len="med"/>
+                    </a:lnB>
+                  </a:tcPr>
+                </a:tc>
+                <a:tc>
+                  <a:txBody>
+                    <a:bodyPr/>
+                    <a:lstStyle/>
+                    <a:p>
+                      <a:pPr indent="0" marL="0">
+                        <a:buNone/>
+                      </a:pPr>
+                      <a:r>
+                        <a:rPr lang="en-US" sz="1200" dirty="0">
+                          <a:solidFill>
+                            <a:srgbClr val="20264A"/>
+                          </a:solidFill>
+                          <a:latin typeface="Courier New" pitchFamily="34" charset="0"/>
+                          <a:ea typeface="Courier New" pitchFamily="34" charset="-122"/>
+                          <a:cs typeface="Courier New" pitchFamily="34" charset="-120"/>
+                        </a:rPr>
+                        <a:t>[{ key, value }, ...] option list</a:t>
+                      </a:r>
+                      <a:endParaRPr lang="en-US" sz="1200" dirty="0">
                         <a:latin typeface="Courier New" charset="0"/>
                         <a:ea typeface="Courier New" charset="0"/>
                         <a:cs typeface="Courier New" charset="0"/>
@@ -4300,12 +5277,12 @@
         </p:nvSpPr>
         <p:spPr>
           <a:xfrm>
-            <a:off x="548640" y="3703320"/>
-            <a:ext cx="11094415" cy="2286000"/>
+            <a:off x="548640" y="4069080"/>
+            <a:ext cx="11094415" cy="2240280"/>
           </a:xfrm>
           <a:prstGeom prst="roundRect">
             <a:avLst>
-              <a:gd name="adj" fmla="val 3200"/>
+              <a:gd name="adj" fmla="val 3265"/>
             </a:avLst>
           </a:prstGeom>
           <a:solidFill>
@@ -4329,7 +5306,7 @@
         </p:nvSpPr>
         <p:spPr>
           <a:xfrm>
-            <a:off x="822960" y="3886200"/>
+            <a:off x="822960" y="4206240"/>
             <a:ext cx="10545775" cy="365760"/>
           </a:xfrm>
           <a:prstGeom prst="rect">
@@ -4376,8 +5353,8 @@
         </p:blipFill>
         <p:spPr>
           <a:xfrm>
-            <a:off x="822960" y="4389120"/>
-            <a:ext cx="219456" cy="219456"/>
+            <a:off x="822960" y="4709160"/>
+            <a:ext cx="201168" cy="201168"/>
           </a:xfrm>
           <a:prstGeom prst="rect">
             <a:avLst/>
@@ -4392,24 +5369,24 @@
         </p:nvSpPr>
         <p:spPr>
           <a:xfrm>
-            <a:off x="1143000" y="4352544"/>
-            <a:ext cx="10225735" cy="365760"/>
-          </a:xfrm>
-          <a:prstGeom prst="rect">
-            <a:avLst/>
-          </a:prstGeom>
-          <a:noFill/>
-          <a:ln/>
-        </p:spPr>
-        <p:txBody>
-          <a:bodyPr wrap="square" lIns="0" tIns="0" rIns="0" bIns="0" rtlCol="0" anchor="ctr"/>
-          <a:lstStyle/>
-          <a:p>
-            <a:pPr indent="0" marL="0">
-              <a:buNone/>
-            </a:pPr>
-            <a:r>
-              <a:rPr lang="en-US" sz="1250" dirty="0">
+            <a:off x="1133856" y="4672584"/>
+            <a:ext cx="10234879" cy="329184"/>
+          </a:xfrm>
+          <a:prstGeom prst="rect">
+            <a:avLst/>
+          </a:prstGeom>
+          <a:noFill/>
+          <a:ln/>
+        </p:spPr>
+        <p:txBody>
+          <a:bodyPr wrap="square" lIns="0" tIns="0" rIns="0" bIns="0" rtlCol="0" anchor="ctr"/>
+          <a:lstStyle/>
+          <a:p>
+            <a:pPr indent="0" marL="0">
+              <a:buNone/>
+            </a:pPr>
+            <a:r>
+              <a:rPr lang="en-US" sz="1200" dirty="0">
                 <a:solidFill>
                   <a:srgbClr val="20264A"/>
                 </a:solidFill>
@@ -4419,7 +5396,7 @@
               </a:rPr>
               <a:t>Fetch navigator once per journey — never re-fetch it mid-flow.</a:t>
             </a:r>
-            <a:endParaRPr lang="en-US" sz="1250" dirty="0"/>
+            <a:endParaRPr lang="en-US" sz="1200" dirty="0"/>
           </a:p>
         </p:txBody>
       </p:sp>
@@ -4439,8 +5416,8 @@
         </p:blipFill>
         <p:spPr>
           <a:xfrm>
-            <a:off x="822960" y="4773168"/>
-            <a:ext cx="219456" cy="219456"/>
+            <a:off x="822960" y="5047488"/>
+            <a:ext cx="201168" cy="201168"/>
           </a:xfrm>
           <a:prstGeom prst="rect">
             <a:avLst/>
@@ -4455,24 +5432,24 @@
         </p:nvSpPr>
         <p:spPr>
           <a:xfrm>
-            <a:off x="1143000" y="4736592"/>
-            <a:ext cx="10225735" cy="365760"/>
-          </a:xfrm>
-          <a:prstGeom prst="rect">
-            <a:avLst/>
-          </a:prstGeom>
-          <a:noFill/>
-          <a:ln/>
-        </p:spPr>
-        <p:txBody>
-          <a:bodyPr wrap="square" lIns="0" tIns="0" rIns="0" bIns="0" rtlCol="0" anchor="ctr"/>
-          <a:lstStyle/>
-          <a:p>
-            <a:pPr indent="0" marL="0">
-              <a:buNone/>
-            </a:pPr>
-            <a:r>
-              <a:rPr lang="en-US" sz="1250" dirty="0">
+            <a:off x="1133856" y="5010912"/>
+            <a:ext cx="10234879" cy="329184"/>
+          </a:xfrm>
+          <a:prstGeom prst="rect">
+            <a:avLst/>
+          </a:prstGeom>
+          <a:noFill/>
+          <a:ln/>
+        </p:spPr>
+        <p:txBody>
+          <a:bodyPr wrap="square" lIns="0" tIns="0" rIns="0" bIns="0" rtlCol="0" anchor="ctr"/>
+          <a:lstStyle/>
+          <a:p>
+            <a:pPr indent="0" marL="0">
+              <a:buNone/>
+            </a:pPr>
+            <a:r>
+              <a:rPr lang="en-US" sz="1200" dirty="0">
                 <a:solidFill>
                   <a:srgbClr val="20264A"/>
                 </a:solidFill>
@@ -4482,7 +5459,7 @@
               </a:rPr>
               <a:t>Fetch template-screens fresh on every screen transition.</a:t>
             </a:r>
-            <a:endParaRPr lang="en-US" sz="1250" dirty="0"/>
+            <a:endParaRPr lang="en-US" sz="1200" dirty="0"/>
           </a:p>
         </p:txBody>
       </p:sp>
@@ -4502,8 +5479,8 @@
         </p:blipFill>
         <p:spPr>
           <a:xfrm>
-            <a:off x="822960" y="5157216"/>
-            <a:ext cx="219456" cy="219456"/>
+            <a:off x="822960" y="5385816"/>
+            <a:ext cx="201168" cy="201168"/>
           </a:xfrm>
           <a:prstGeom prst="rect">
             <a:avLst/>
@@ -4518,24 +5495,24 @@
         </p:nvSpPr>
         <p:spPr>
           <a:xfrm>
-            <a:off x="1143000" y="5120640"/>
-            <a:ext cx="10225735" cy="365760"/>
-          </a:xfrm>
-          <a:prstGeom prst="rect">
-            <a:avLst/>
-          </a:prstGeom>
-          <a:noFill/>
-          <a:ln/>
-        </p:spPr>
-        <p:txBody>
-          <a:bodyPr wrap="square" lIns="0" tIns="0" rIns="0" bIns="0" rtlCol="0" anchor="ctr"/>
-          <a:lstStyle/>
-          <a:p>
-            <a:pPr indent="0" marL="0">
-              <a:buNone/>
-            </a:pPr>
-            <a:r>
-              <a:rPr lang="en-US" sz="1250" dirty="0">
+            <a:off x="1133856" y="5349240"/>
+            <a:ext cx="10234879" cy="329184"/>
+          </a:xfrm>
+          <a:prstGeom prst="rect">
+            <a:avLst/>
+          </a:prstGeom>
+          <a:noFill/>
+          <a:ln/>
+        </p:spPr>
+        <p:txBody>
+          <a:bodyPr wrap="square" lIns="0" tIns="0" rIns="0" bIns="0" rtlCol="0" anchor="ctr"/>
+          <a:lstStyle/>
+          <a:p>
+            <a:pPr indent="0" marL="0">
+              <a:buNone/>
+            </a:pPr>
+            <a:r>
+              <a:rPr lang="en-US" sz="1200" dirty="0">
                 <a:solidFill>
                   <a:srgbClr val="20264A"/>
                 </a:solidFill>
@@ -4545,7 +5522,7 @@
               </a:rPr>
               <a:t>Look up fields by componentId, not by array index.</a:t>
             </a:r>
-            <a:endParaRPr lang="en-US" sz="1250" dirty="0"/>
+            <a:endParaRPr lang="en-US" sz="1200" dirty="0"/>
           </a:p>
         </p:txBody>
       </p:sp>
@@ -4565,8 +5542,8 @@
         </p:blipFill>
         <p:spPr>
           <a:xfrm>
-            <a:off x="822960" y="5541264"/>
-            <a:ext cx="219456" cy="219456"/>
+            <a:off x="822960" y="5724144"/>
+            <a:ext cx="201168" cy="201168"/>
           </a:xfrm>
           <a:prstGeom prst="rect">
             <a:avLst/>
@@ -4581,24 +5558,24 @@
         </p:nvSpPr>
         <p:spPr>
           <a:xfrm>
-            <a:off x="1143000" y="5504688"/>
-            <a:ext cx="10225735" cy="365760"/>
-          </a:xfrm>
-          <a:prstGeom prst="rect">
-            <a:avLst/>
-          </a:prstGeom>
-          <a:noFill/>
-          <a:ln/>
-        </p:spPr>
-        <p:txBody>
-          <a:bodyPr wrap="square" lIns="0" tIns="0" rIns="0" bIns="0" rtlCol="0" anchor="ctr"/>
-          <a:lstStyle/>
-          <a:p>
-            <a:pPr indent="0" marL="0">
-              <a:buNone/>
-            </a:pPr>
-            <a:r>
-              <a:rPr lang="en-US" sz="1250" dirty="0">
+            <a:off x="1133856" y="5687568"/>
+            <a:ext cx="10234879" cy="329184"/>
+          </a:xfrm>
+          <a:prstGeom prst="rect">
+            <a:avLst/>
+          </a:prstGeom>
+          <a:noFill/>
+          <a:ln/>
+        </p:spPr>
+        <p:txBody>
+          <a:bodyPr wrap="square" lIns="0" tIns="0" rIns="0" bIns="0" rtlCol="0" anchor="ctr"/>
+          <a:lstStyle/>
+          <a:p>
+            <a:pPr indent="0" marL="0">
+              <a:buNone/>
+            </a:pPr>
+            <a:r>
+              <a:rPr lang="en-US" sz="1200" dirty="0">
                 <a:solidFill>
                   <a:srgbClr val="20264A"/>
                 </a:solidFill>
@@ -4606,73 +5583,97 @@
                 <a:ea typeface="Calibri" pitchFamily="34" charset="-122"/>
                 <a:cs typeface="Calibri" pitchFamily="34" charset="-120"/>
               </a:rPr>
-              <a:t>Treat defaultValue as either a literal or a variable binding — never assume which without checking.</a:t>
-            </a:r>
-            <a:endParaRPr lang="en-US" sz="1250" dirty="0"/>
-          </a:p>
-        </p:txBody>
-      </p:sp>
-      <p:sp>
-        <p:nvSpPr>
-          <p:cNvPr id="15" name="Text 8"/>
-          <p:cNvSpPr/>
-          <p:nvPr/>
-        </p:nvSpPr>
-        <p:spPr>
-          <a:xfrm>
-            <a:off x="548640" y="6446520"/>
-            <a:ext cx="6400800" cy="274320"/>
-          </a:xfrm>
-          <a:prstGeom prst="rect">
-            <a:avLst/>
-          </a:prstGeom>
-          <a:noFill/>
-          <a:ln/>
-        </p:spPr>
-        <p:txBody>
-          <a:bodyPr wrap="square" lIns="0" tIns="0" rIns="0" bIns="0" rtlCol="0" anchor="ctr"/>
-          <a:lstStyle/>
-          <a:p>
-            <a:pPr indent="0" marL="0">
-              <a:buNone/>
-            </a:pPr>
-            <a:r>
-              <a:rPr lang="en-US" sz="1000" dirty="0">
-                <a:solidFill>
-                  <a:srgbClr val="5B6B8C"/>
+              <a:t>Match field keys to canonical UPPER_SNAKE_CASE variable names — prefill is a direct spread, not a lookup.</a:t>
+            </a:r>
+            <a:endParaRPr lang="en-US" sz="1200" dirty="0"/>
+          </a:p>
+        </p:txBody>
+      </p:sp>
+      <p:pic>
+        <p:nvPicPr>
+          <p:cNvPr id="15" name="Image 4" descr="preencoded.png">    </p:cNvPr>
+          <p:cNvPicPr>
+            <a:picLocks noChangeAspect="1"/>
+          </p:cNvPicPr>
+          <p:nvPr/>
+        </p:nvPicPr>
+        <p:blipFill>
+          <a:blip r:embed="rId5"/>
+          <a:stretch>
+            <a:fillRect/>
+          </a:stretch>
+        </p:blipFill>
+        <p:spPr>
+          <a:xfrm>
+            <a:off x="822960" y="6062472"/>
+            <a:ext cx="201168" cy="201168"/>
+          </a:xfrm>
+          <a:prstGeom prst="rect">
+            <a:avLst/>
+          </a:prstGeom>
+        </p:spPr>
+      </p:pic>
+      <p:sp>
+        <p:nvSpPr>
+          <p:cNvPr id="16" name="Text 8"/>
+          <p:cNvSpPr/>
+          <p:nvPr/>
+        </p:nvSpPr>
+        <p:spPr>
+          <a:xfrm>
+            <a:off x="1133856" y="6025896"/>
+            <a:ext cx="10234879" cy="329184"/>
+          </a:xfrm>
+          <a:prstGeom prst="rect">
+            <a:avLst/>
+          </a:prstGeom>
+          <a:noFill/>
+          <a:ln/>
+        </p:spPr>
+        <p:txBody>
+          <a:bodyPr wrap="square" lIns="0" tIns="0" rIns="0" bIns="0" rtlCol="0" anchor="ctr"/>
+          <a:lstStyle/>
+          <a:p>
+            <a:pPr indent="0" marL="0">
+              <a:buNone/>
+            </a:pPr>
+            <a:r>
+              <a:rPr lang="en-US" sz="1200" dirty="0">
+                <a:solidFill>
+                  <a:srgbClr val="20264A"/>
                 </a:solidFill>
                 <a:latin typeface="Calibri" pitchFamily="34" charset="0"/>
                 <a:ea typeface="Calibri" pitchFamily="34" charset="-122"/>
                 <a:cs typeface="Calibri" pitchFamily="34" charset="-120"/>
               </a:rPr>
-              <a:t>Navigator &amp; Template-Screen — Integration Guide</a:t>
-            </a:r>
-            <a:endParaRPr lang="en-US" sz="1000" dirty="0"/>
-          </a:p>
-        </p:txBody>
-      </p:sp>
-      <p:sp>
-        <p:nvSpPr>
-          <p:cNvPr id="16" name="Text 9"/>
-          <p:cNvSpPr/>
-          <p:nvPr/>
-        </p:nvSpPr>
-        <p:spPr>
-          <a:xfrm>
-            <a:off x="11185855" y="6446520"/>
-            <a:ext cx="457200" cy="274320"/>
-          </a:xfrm>
-          <a:prstGeom prst="rect">
-            <a:avLst/>
-          </a:prstGeom>
-          <a:noFill/>
-          <a:ln/>
-        </p:spPr>
-        <p:txBody>
-          <a:bodyPr wrap="square" lIns="0" tIns="0" rIns="0" bIns="0" rtlCol="0" anchor="ctr"/>
-          <a:lstStyle/>
-          <a:p>
-            <a:pPr algn="r" indent="0" marL="0">
+              <a:t>Use isDropdownComponent to catch fields that need a live dataSource fetch.</a:t>
+            </a:r>
+            <a:endParaRPr lang="en-US" sz="1200" dirty="0"/>
+          </a:p>
+        </p:txBody>
+      </p:sp>
+      <p:sp>
+        <p:nvSpPr>
+          <p:cNvPr id="17" name="Text 9"/>
+          <p:cNvSpPr/>
+          <p:nvPr/>
+        </p:nvSpPr>
+        <p:spPr>
+          <a:xfrm>
+            <a:off x="548640" y="6446520"/>
+            <a:ext cx="6400800" cy="274320"/>
+          </a:xfrm>
+          <a:prstGeom prst="rect">
+            <a:avLst/>
+          </a:prstGeom>
+          <a:noFill/>
+          <a:ln/>
+        </p:spPr>
+        <p:txBody>
+          <a:bodyPr wrap="square" lIns="0" tIns="0" rIns="0" bIns="0" rtlCol="0" anchor="ctr"/>
+          <a:lstStyle/>
+          <a:p>
+            <a:pPr indent="0" marL="0">
               <a:buNone/>
             </a:pPr>
             <a:r>
@@ -4684,7 +5685,46 @@
                 <a:ea typeface="Calibri" pitchFamily="34" charset="-122"/>
                 <a:cs typeface="Calibri" pitchFamily="34" charset="-120"/>
               </a:rPr>
-              <a:t>12</a:t>
+              <a:t>Navigator &amp; Template-Screen — Integration Guide</a:t>
+            </a:r>
+            <a:endParaRPr lang="en-US" sz="1000" dirty="0"/>
+          </a:p>
+        </p:txBody>
+      </p:sp>
+      <p:sp>
+        <p:nvSpPr>
+          <p:cNvPr id="18" name="Text 10"/>
+          <p:cNvSpPr/>
+          <p:nvPr/>
+        </p:nvSpPr>
+        <p:spPr>
+          <a:xfrm>
+            <a:off x="11185855" y="6446520"/>
+            <a:ext cx="457200" cy="274320"/>
+          </a:xfrm>
+          <a:prstGeom prst="rect">
+            <a:avLst/>
+          </a:prstGeom>
+          <a:noFill/>
+          <a:ln/>
+        </p:spPr>
+        <p:txBody>
+          <a:bodyPr wrap="square" lIns="0" tIns="0" rIns="0" bIns="0" rtlCol="0" anchor="ctr"/>
+          <a:lstStyle/>
+          <a:p>
+            <a:pPr algn="r" indent="0" marL="0">
+              <a:buNone/>
+            </a:pPr>
+            <a:r>
+              <a:rPr lang="en-US" sz="1000" dirty="0">
+                <a:solidFill>
+                  <a:srgbClr val="5B6B8C"/>
+                </a:solidFill>
+                <a:latin typeface="Calibri" pitchFamily="34" charset="0"/>
+                <a:ea typeface="Calibri" pitchFamily="34" charset="-122"/>
+                <a:cs typeface="Calibri" pitchFamily="34" charset="-120"/>
+              </a:rPr>
+              <a:t>13</a:t>
             </a:r>
             <a:endParaRPr lang="en-US" sz="1000" dirty="0"/>
           </a:p>
@@ -4698,9 +5738,9 @@
 </p:sld>
 </file>
 
-<file path=ppt/slides/slide13.xml><?xml version="1.0" encoding="utf-8"?>
+<file path=ppt/slides/slide14.xml><?xml version="1.0" encoding="utf-8"?>
 <p:sld xmlns:a="http://schemas.openxmlformats.org/drawingml/2006/main" xmlns:r="http://schemas.openxmlformats.org/officeDocument/2006/relationships" xmlns:p="http://schemas.openxmlformats.org/presentationml/2006/main">
-  <p:cSld name="Slide 13">
+  <p:cSld name="Slide 14">
     <p:bg>
       <p:bgPr>
         <a:solidFill>
@@ -5409,7 +6449,7 @@
                 <a:ea typeface="Calibri" pitchFamily="34" charset="-122"/>
                 <a:cs typeface="Calibri" pitchFamily="34" charset="-120"/>
               </a:rPr>
-              <a:t>13</a:t>
+              <a:t>14</a:t>
             </a:r>
             <a:endParaRPr lang="en-US" sz="1000" dirty="0"/>
           </a:p>
@@ -5423,9 +6463,9 @@
 </p:sld>
 </file>
 
-<file path=ppt/slides/slide14.xml><?xml version="1.0" encoding="utf-8"?>
+<file path=ppt/slides/slide15.xml><?xml version="1.0" encoding="utf-8"?>
 <p:sld xmlns:a="http://schemas.openxmlformats.org/drawingml/2006/main" xmlns:r="http://schemas.openxmlformats.org/officeDocument/2006/relationships" xmlns:p="http://schemas.openxmlformats.org/presentationml/2006/main">
-  <p:cSld name="Slide 14">
+  <p:cSld name="Slide 15">
     <p:bg>
       <p:bgPr>
         <a:solidFill>
@@ -9873,7 +10913,7 @@
         </p:nvSpPr>
         <p:spPr>
           <a:xfrm>
-            <a:off x="4709160" y="2715768"/>
+            <a:off x="4709160" y="2660904"/>
             <a:ext cx="2971800" cy="0"/>
           </a:xfrm>
           <a:prstGeom prst="line">
@@ -9896,7 +10936,7 @@
         </p:nvSpPr>
         <p:spPr>
           <a:xfrm>
-            <a:off x="7479792" y="2615184"/>
+            <a:off x="7479792" y="2560320"/>
             <a:ext cx="201168" cy="201168"/>
           </a:xfrm>
           <a:prstGeom prst="rect">
@@ -9932,7 +10972,7 @@
         </p:nvSpPr>
         <p:spPr>
           <a:xfrm>
-            <a:off x="4572000" y="2395728"/>
+            <a:off x="4572000" y="2340864"/>
             <a:ext cx="274320" cy="274320"/>
           </a:xfrm>
           <a:prstGeom prst="ellipse">
@@ -9952,7 +10992,7 @@
         </p:nvSpPr>
         <p:spPr>
           <a:xfrm>
-            <a:off x="4572000" y="2395728"/>
+            <a:off x="4572000" y="2340864"/>
             <a:ext cx="274320" cy="274320"/>
           </a:xfrm>
           <a:prstGeom prst="rect">
@@ -9991,7 +11031,7 @@
         </p:nvSpPr>
         <p:spPr>
           <a:xfrm>
-            <a:off x="4983480" y="2423160"/>
+            <a:off x="4983480" y="2368296"/>
             <a:ext cx="2606040" cy="256032"/>
           </a:xfrm>
           <a:prstGeom prst="rect">
@@ -10030,7 +11070,7 @@
         </p:nvSpPr>
         <p:spPr>
           <a:xfrm>
-            <a:off x="4709160" y="3191256"/>
+            <a:off x="4709160" y="3081528"/>
             <a:ext cx="2971800" cy="0"/>
           </a:xfrm>
           <a:prstGeom prst="line">
@@ -10053,7 +11093,7 @@
         </p:nvSpPr>
         <p:spPr>
           <a:xfrm>
-            <a:off x="4727448" y="3090672"/>
+            <a:off x="4727448" y="2980944"/>
             <a:ext cx="201168" cy="201168"/>
           </a:xfrm>
           <a:prstGeom prst="rect">
@@ -10089,7 +11129,7 @@
         </p:nvSpPr>
         <p:spPr>
           <a:xfrm>
-            <a:off x="4846320" y="2898648"/>
+            <a:off x="4846320" y="2788920"/>
             <a:ext cx="2606040" cy="256032"/>
           </a:xfrm>
           <a:prstGeom prst="rect">
@@ -10128,7 +11168,7 @@
         </p:nvSpPr>
         <p:spPr>
           <a:xfrm>
-            <a:off x="4709160" y="3666744"/>
+            <a:off x="4709160" y="3502152"/>
             <a:ext cx="5943600" cy="0"/>
           </a:xfrm>
           <a:prstGeom prst="line">
@@ -10151,7 +11191,7 @@
         </p:nvSpPr>
         <p:spPr>
           <a:xfrm>
-            <a:off x="10451592" y="3566160"/>
+            <a:off x="10451592" y="3401568"/>
             <a:ext cx="201168" cy="201168"/>
           </a:xfrm>
           <a:prstGeom prst="rect">
@@ -10187,7 +11227,7 @@
         </p:nvSpPr>
         <p:spPr>
           <a:xfrm>
-            <a:off x="4572000" y="3346704"/>
+            <a:off x="4572000" y="3182112"/>
             <a:ext cx="274320" cy="274320"/>
           </a:xfrm>
           <a:prstGeom prst="ellipse">
@@ -10207,7 +11247,7 @@
         </p:nvSpPr>
         <p:spPr>
           <a:xfrm>
-            <a:off x="4572000" y="3346704"/>
+            <a:off x="4572000" y="3182112"/>
             <a:ext cx="274320" cy="274320"/>
           </a:xfrm>
           <a:prstGeom prst="rect">
@@ -10246,7 +11286,7 @@
         </p:nvSpPr>
         <p:spPr>
           <a:xfrm>
-            <a:off x="4983480" y="3374136"/>
+            <a:off x="4983480" y="3209544"/>
             <a:ext cx="5577840" cy="256032"/>
           </a:xfrm>
           <a:prstGeom prst="rect">
@@ -10285,7 +11325,7 @@
         </p:nvSpPr>
         <p:spPr>
           <a:xfrm>
-            <a:off x="4709160" y="4142232"/>
+            <a:off x="4709160" y="3922776"/>
             <a:ext cx="5943600" cy="0"/>
           </a:xfrm>
           <a:prstGeom prst="line">
@@ -10308,7 +11348,7 @@
         </p:nvSpPr>
         <p:spPr>
           <a:xfrm>
-            <a:off x="4727448" y="4041648"/>
+            <a:off x="4727448" y="3822192"/>
             <a:ext cx="201168" cy="201168"/>
           </a:xfrm>
           <a:prstGeom prst="rect">
@@ -10344,7 +11384,7 @@
         </p:nvSpPr>
         <p:spPr>
           <a:xfrm>
-            <a:off x="4846320" y="3849624"/>
+            <a:off x="4846320" y="3630168"/>
             <a:ext cx="5577840" cy="256032"/>
           </a:xfrm>
           <a:prstGeom prst="rect">
@@ -10383,7 +11423,7 @@
         </p:nvSpPr>
         <p:spPr>
           <a:xfrm>
-            <a:off x="4709160" y="4754880"/>
+            <a:off x="4709160" y="4480560"/>
             <a:ext cx="2971800" cy="0"/>
           </a:xfrm>
           <a:prstGeom prst="line">
@@ -10406,7 +11446,7 @@
         </p:nvSpPr>
         <p:spPr>
           <a:xfrm>
-            <a:off x="7479792" y="4654296"/>
+            <a:off x="7479792" y="4379976"/>
             <a:ext cx="201168" cy="201168"/>
           </a:xfrm>
           <a:prstGeom prst="rect">
@@ -10442,7 +11482,7 @@
         </p:nvSpPr>
         <p:spPr>
           <a:xfrm>
-            <a:off x="4572000" y="4434840"/>
+            <a:off x="4572000" y="4160520"/>
             <a:ext cx="274320" cy="274320"/>
           </a:xfrm>
           <a:prstGeom prst="ellipse">
@@ -10462,7 +11502,7 @@
         </p:nvSpPr>
         <p:spPr>
           <a:xfrm>
-            <a:off x="4572000" y="4434840"/>
+            <a:off x="4572000" y="4160520"/>
             <a:ext cx="274320" cy="274320"/>
           </a:xfrm>
           <a:prstGeom prst="rect">
@@ -10501,7 +11541,7 @@
         </p:nvSpPr>
         <p:spPr>
           <a:xfrm>
-            <a:off x="4983480" y="4462272"/>
+            <a:off x="4983480" y="4187952"/>
             <a:ext cx="2606040" cy="256032"/>
           </a:xfrm>
           <a:prstGeom prst="rect">
@@ -10540,7 +11580,7 @@
         </p:nvSpPr>
         <p:spPr>
           <a:xfrm>
-            <a:off x="4709160" y="5230368"/>
+            <a:off x="4709160" y="4901184"/>
             <a:ext cx="2971800" cy="0"/>
           </a:xfrm>
           <a:prstGeom prst="line">
@@ -10563,7 +11603,7 @@
         </p:nvSpPr>
         <p:spPr>
           <a:xfrm>
-            <a:off x="4727448" y="5129784"/>
+            <a:off x="4727448" y="4800600"/>
             <a:ext cx="201168" cy="201168"/>
           </a:xfrm>
           <a:prstGeom prst="rect">
@@ -10599,7 +11639,7 @@
         </p:nvSpPr>
         <p:spPr>
           <a:xfrm>
-            <a:off x="4846320" y="4937760"/>
+            <a:off x="4846320" y="4608576"/>
             <a:ext cx="2606040" cy="256032"/>
           </a:xfrm>
           <a:prstGeom prst="rect">
@@ -10638,7 +11678,105 @@
         </p:nvSpPr>
         <p:spPr>
           <a:xfrm>
-            <a:off x="1737360" y="5705856"/>
+            <a:off x="4709160" y="5266944"/>
+            <a:ext cx="2971800" cy="0"/>
+          </a:xfrm>
+          <a:prstGeom prst="line">
+            <a:avLst/>
+          </a:prstGeom>
+          <a:noFill/>
+          <a:ln w="15875">
+            <a:solidFill>
+              <a:srgbClr val="8C7A4A"/>
+            </a:solidFill>
+            <a:prstDash val="dash"/>
+          </a:ln>
+        </p:spPr>
+      </p:sp>
+      <p:sp>
+        <p:nvSpPr>
+          <p:cNvPr id="48" name="Text 42"/>
+          <p:cNvSpPr/>
+          <p:nvPr/>
+        </p:nvSpPr>
+        <p:spPr>
+          <a:xfrm>
+            <a:off x="7479792" y="5166360"/>
+            <a:ext cx="201168" cy="201168"/>
+          </a:xfrm>
+          <a:prstGeom prst="rect">
+            <a:avLst/>
+          </a:prstGeom>
+          <a:noFill/>
+          <a:ln/>
+        </p:spPr>
+        <p:txBody>
+          <a:bodyPr wrap="square" lIns="0" tIns="0" rIns="0" bIns="0" rtlCol="0" anchor="ctr"/>
+          <a:lstStyle/>
+          <a:p>
+            <a:pPr algn="ctr" indent="0" marL="0">
+              <a:buNone/>
+            </a:pPr>
+            <a:r>
+              <a:rPr lang="en-US" sz="1300" dirty="0">
+                <a:solidFill>
+                  <a:srgbClr val="8C7A4A"/>
+                </a:solidFill>
+              </a:rPr>
+              <a:t>▸</a:t>
+            </a:r>
+            <a:endParaRPr lang="en-US" sz="1300" dirty="0"/>
+          </a:p>
+        </p:txBody>
+      </p:sp>
+      <p:sp>
+        <p:nvSpPr>
+          <p:cNvPr id="49" name="Text 43"/>
+          <p:cNvSpPr/>
+          <p:nvPr/>
+        </p:nvSpPr>
+        <p:spPr>
+          <a:xfrm>
+            <a:off x="4846320" y="4974336"/>
+            <a:ext cx="2606040" cy="256032"/>
+          </a:xfrm>
+          <a:prstGeom prst="rect">
+            <a:avLst/>
+          </a:prstGeom>
+          <a:noFill/>
+          <a:ln/>
+        </p:spPr>
+        <p:txBody>
+          <a:bodyPr wrap="square" lIns="0" tIns="0" rIns="0" bIns="0" rtlCol="0" anchor="ctr"/>
+          <a:lstStyle/>
+          <a:p>
+            <a:pPr algn="l" indent="0" marL="0">
+              <a:buNone/>
+            </a:pPr>
+            <a:r>
+              <a:rPr lang="en-US" sz="950" i="1" dirty="0">
+                <a:solidFill>
+                  <a:srgbClr val="20264A"/>
+                </a:solidFill>
+                <a:latin typeface="Calibri" pitchFamily="34" charset="0"/>
+                <a:ea typeface="Calibri" pitchFamily="34" charset="-122"/>
+                <a:cs typeface="Calibri" pitchFamily="34" charset="-120"/>
+              </a:rPr>
+              <a:t>opt — GET dataSource.url (live dropdown)</a:t>
+            </a:r>
+            <a:endParaRPr lang="en-US" sz="950" dirty="0"/>
+          </a:p>
+        </p:txBody>
+      </p:sp>
+      <p:sp>
+        <p:nvSpPr>
+          <p:cNvPr id="50" name="Shape 44"/>
+          <p:cNvSpPr/>
+          <p:nvPr/>
+        </p:nvSpPr>
+        <p:spPr>
+          <a:xfrm>
+            <a:off x="1737360" y="5687568"/>
             <a:ext cx="2971800" cy="0"/>
           </a:xfrm>
           <a:prstGeom prst="line">
@@ -10655,13 +11793,13 @@
       </p:sp>
       <p:sp>
         <p:nvSpPr>
-          <p:cNvPr id="48" name="Text 42"/>
-          <p:cNvSpPr/>
-          <p:nvPr/>
-        </p:nvSpPr>
-        <p:spPr>
-          <a:xfrm>
-            <a:off x="4507992" y="5605272"/>
+          <p:cNvPr id="51" name="Text 45"/>
+          <p:cNvSpPr/>
+          <p:nvPr/>
+        </p:nvSpPr>
+        <p:spPr>
+          <a:xfrm>
+            <a:off x="4507992" y="5586984"/>
             <a:ext cx="201168" cy="201168"/>
           </a:xfrm>
           <a:prstGeom prst="rect">
@@ -10691,13 +11829,13 @@
       </p:sp>
       <p:sp>
         <p:nvSpPr>
-          <p:cNvPr id="49" name="Text 43"/>
-          <p:cNvSpPr/>
-          <p:nvPr/>
-        </p:nvSpPr>
-        <p:spPr>
-          <a:xfrm>
-            <a:off x="1874520" y="5413248"/>
+          <p:cNvPr id="52" name="Text 46"/>
+          <p:cNvSpPr/>
+          <p:nvPr/>
+        </p:nvSpPr>
+        <p:spPr>
+          <a:xfrm>
+            <a:off x="1874520" y="5394960"/>
             <a:ext cx="2606040" cy="256032"/>
           </a:xfrm>
           <a:prstGeom prst="rect">
@@ -10730,13 +11868,13 @@
       </p:sp>
       <p:sp>
         <p:nvSpPr>
-          <p:cNvPr id="50" name="Shape 44"/>
-          <p:cNvSpPr/>
-          <p:nvPr/>
-        </p:nvSpPr>
-        <p:spPr>
-          <a:xfrm>
-            <a:off x="4709160" y="6181344"/>
+          <p:cNvPr id="53" name="Shape 47"/>
+          <p:cNvSpPr/>
+          <p:nvPr/>
+        </p:nvSpPr>
+        <p:spPr>
+          <a:xfrm>
+            <a:off x="4709160" y="6108192"/>
             <a:ext cx="5943600" cy="0"/>
           </a:xfrm>
           <a:prstGeom prst="line">
@@ -10753,13 +11891,13 @@
       </p:sp>
       <p:sp>
         <p:nvSpPr>
-          <p:cNvPr id="51" name="Text 45"/>
-          <p:cNvSpPr/>
-          <p:nvPr/>
-        </p:nvSpPr>
-        <p:spPr>
-          <a:xfrm>
-            <a:off x="10451592" y="6080760"/>
+          <p:cNvPr id="54" name="Text 48"/>
+          <p:cNvSpPr/>
+          <p:nvPr/>
+        </p:nvSpPr>
+        <p:spPr>
+          <a:xfrm>
+            <a:off x="10451592" y="6007608"/>
             <a:ext cx="201168" cy="201168"/>
           </a:xfrm>
           <a:prstGeom prst="rect">
@@ -10789,13 +11927,13 @@
       </p:sp>
       <p:sp>
         <p:nvSpPr>
-          <p:cNvPr id="52" name="Shape 46"/>
-          <p:cNvSpPr/>
-          <p:nvPr/>
-        </p:nvSpPr>
-        <p:spPr>
-          <a:xfrm>
-            <a:off x="4572000" y="5861304"/>
+          <p:cNvPr id="55" name="Shape 49"/>
+          <p:cNvSpPr/>
+          <p:nvPr/>
+        </p:nvSpPr>
+        <p:spPr>
+          <a:xfrm>
+            <a:off x="4572000" y="5788152"/>
             <a:ext cx="274320" cy="274320"/>
           </a:xfrm>
           <a:prstGeom prst="ellipse">
@@ -10809,13 +11947,13 @@
       </p:sp>
       <p:sp>
         <p:nvSpPr>
-          <p:cNvPr id="53" name="Text 47"/>
-          <p:cNvSpPr/>
-          <p:nvPr/>
-        </p:nvSpPr>
-        <p:spPr>
-          <a:xfrm>
-            <a:off x="4572000" y="5861304"/>
+          <p:cNvPr id="56" name="Text 50"/>
+          <p:cNvSpPr/>
+          <p:nvPr/>
+        </p:nvSpPr>
+        <p:spPr>
+          <a:xfrm>
+            <a:off x="4572000" y="5788152"/>
             <a:ext cx="274320" cy="274320"/>
           </a:xfrm>
           <a:prstGeom prst="rect">
@@ -10848,13 +11986,13 @@
       </p:sp>
       <p:sp>
         <p:nvSpPr>
-          <p:cNvPr id="54" name="Text 48"/>
-          <p:cNvSpPr/>
-          <p:nvPr/>
-        </p:nvSpPr>
-        <p:spPr>
-          <a:xfrm>
-            <a:off x="4983480" y="5888736"/>
+          <p:cNvPr id="57" name="Text 51"/>
+          <p:cNvSpPr/>
+          <p:nvPr/>
+        </p:nvSpPr>
+        <p:spPr>
+          <a:xfrm>
+            <a:off x="4983480" y="5815584"/>
             <a:ext cx="5577840" cy="256032"/>
           </a:xfrm>
           <a:prstGeom prst="rect">
@@ -10887,18 +12025,18 @@
       </p:sp>
       <p:sp>
         <p:nvSpPr>
-          <p:cNvPr id="55" name="Shape 49"/>
-          <p:cNvSpPr/>
-          <p:nvPr/>
-        </p:nvSpPr>
-        <p:spPr>
-          <a:xfrm>
-            <a:off x="4389120" y="4434840"/>
-            <a:ext cx="6583680" cy="2020824"/>
+          <p:cNvPr id="58" name="Shape 52"/>
+          <p:cNvSpPr/>
+          <p:nvPr/>
+        </p:nvSpPr>
+        <p:spPr>
+          <a:xfrm>
+            <a:off x="4389120" y="4197096"/>
+            <a:ext cx="6583680" cy="2167128"/>
           </a:xfrm>
           <a:prstGeom prst="roundRect">
             <a:avLst>
-              <a:gd name="adj" fmla="val 2715"/>
+              <a:gd name="adj" fmla="val 2532"/>
             </a:avLst>
           </a:prstGeom>
           <a:ln w="15875">
@@ -10911,13 +12049,13 @@
       </p:sp>
       <p:sp>
         <p:nvSpPr>
-          <p:cNvPr id="56" name="Text 50"/>
-          <p:cNvSpPr/>
-          <p:nvPr/>
-        </p:nvSpPr>
-        <p:spPr>
-          <a:xfrm>
-            <a:off x="4389120" y="4178808"/>
+          <p:cNvPr id="59" name="Text 53"/>
+          <p:cNvSpPr/>
+          <p:nvPr/>
+        </p:nvSpPr>
+        <p:spPr>
+          <a:xfrm>
+            <a:off x="4389120" y="3941064"/>
             <a:ext cx="3291840" cy="237744"/>
           </a:xfrm>
           <a:prstGeom prst="rect">
@@ -10950,7 +12088,7 @@
       </p:sp>
       <p:sp>
         <p:nvSpPr>
-          <p:cNvPr id="57" name="Text 51"/>
+          <p:cNvPr id="60" name="Text 54"/>
           <p:cNvSpPr/>
           <p:nvPr/>
         </p:nvSpPr>
@@ -10989,7 +12127,7 @@
       </p:sp>
       <p:sp>
         <p:nvSpPr>
-          <p:cNvPr id="58" name="Text 52"/>
+          <p:cNvPr id="61" name="Text 55"/>
           <p:cNvSpPr/>
           <p:nvPr/>
         </p:nvSpPr>
